--- a/submission/GCB/figures/Figure6.pptx
+++ b/submission/GCB/figures/Figure6.pptx
@@ -3690,8 +3690,8 @@
         </p:nvSpPr>
         <p:spPr>
           <a:xfrm>
-            <a:off x="1275120" y="1313280"/>
-            <a:ext cx="561240" cy="326520"/>
+            <a:off x="1274760" y="1315080"/>
+            <a:ext cx="562680" cy="325080"/>
           </a:xfrm>
           <a:custGeom>
             <a:avLst/>
@@ -3699,300 +3699,300 @@
             <a:ahLst/>
             <a:rect l="0" t="0" r="r" b="b"/>
             <a:pathLst>
-              <a:path w="1559" h="907">
+              <a:path w="1563" h="903">
                 <a:moveTo>
-                  <a:pt x="183" y="350"/>
+                  <a:pt x="184" y="344"/>
                 </a:moveTo>
                 <a:lnTo>
-                  <a:pt x="198" y="309"/>
-                </a:lnTo>
-                <a:lnTo>
-                  <a:pt x="217" y="269"/>
-                </a:lnTo>
-                <a:lnTo>
-                  <a:pt x="240" y="230"/>
-                </a:lnTo>
-                <a:lnTo>
-                  <a:pt x="268" y="193"/>
-                </a:lnTo>
-                <a:lnTo>
-                  <a:pt x="300" y="158"/>
-                </a:lnTo>
-                <a:lnTo>
-                  <a:pt x="337" y="126"/>
-                </a:lnTo>
-                <a:lnTo>
-                  <a:pt x="378" y="97"/>
-                </a:lnTo>
-                <a:lnTo>
-                  <a:pt x="422" y="71"/>
-                </a:lnTo>
-                <a:lnTo>
-                  <a:pt x="470" y="48"/>
-                </a:lnTo>
-                <a:lnTo>
-                  <a:pt x="520" y="30"/>
-                </a:lnTo>
-                <a:lnTo>
-                  <a:pt x="574" y="15"/>
-                </a:lnTo>
-                <a:lnTo>
-                  <a:pt x="630" y="5"/>
-                </a:lnTo>
-                <a:lnTo>
-                  <a:pt x="689" y="0"/>
-                </a:lnTo>
-                <a:lnTo>
-                  <a:pt x="749" y="0"/>
-                </a:lnTo>
-                <a:lnTo>
-                  <a:pt x="797" y="3"/>
-                </a:lnTo>
-                <a:lnTo>
-                  <a:pt x="845" y="10"/>
-                </a:lnTo>
-                <a:lnTo>
-                  <a:pt x="894" y="20"/>
-                </a:lnTo>
-                <a:lnTo>
-                  <a:pt x="943" y="33"/>
-                </a:lnTo>
-                <a:lnTo>
-                  <a:pt x="993" y="49"/>
-                </a:lnTo>
-                <a:lnTo>
-                  <a:pt x="1042" y="69"/>
-                </a:lnTo>
-                <a:lnTo>
-                  <a:pt x="1091" y="92"/>
-                </a:lnTo>
-                <a:lnTo>
-                  <a:pt x="1140" y="118"/>
-                </a:lnTo>
-                <a:lnTo>
-                  <a:pt x="1188" y="148"/>
-                </a:lnTo>
-                <a:lnTo>
-                  <a:pt x="1236" y="182"/>
-                </a:lnTo>
-                <a:lnTo>
-                  <a:pt x="1282" y="218"/>
-                </a:lnTo>
-                <a:lnTo>
-                  <a:pt x="1327" y="258"/>
-                </a:lnTo>
-                <a:lnTo>
-                  <a:pt x="1370" y="301"/>
-                </a:lnTo>
-                <a:lnTo>
-                  <a:pt x="1412" y="348"/>
-                </a:lnTo>
-                <a:lnTo>
-                  <a:pt x="1452" y="397"/>
-                </a:lnTo>
-                <a:lnTo>
-                  <a:pt x="1490" y="451"/>
-                </a:lnTo>
-                <a:lnTo>
-                  <a:pt x="1526" y="507"/>
-                </a:lnTo>
-                <a:lnTo>
-                  <a:pt x="1559" y="565"/>
-                </a:lnTo>
-                <a:lnTo>
-                  <a:pt x="1509" y="615"/>
-                </a:lnTo>
-                <a:lnTo>
-                  <a:pt x="1457" y="661"/>
-                </a:lnTo>
-                <a:lnTo>
-                  <a:pt x="1403" y="702"/>
-                </a:lnTo>
-                <a:lnTo>
-                  <a:pt x="1349" y="741"/>
-                </a:lnTo>
-                <a:lnTo>
-                  <a:pt x="1293" y="775"/>
-                </a:lnTo>
-                <a:lnTo>
-                  <a:pt x="1236" y="805"/>
-                </a:lnTo>
-                <a:lnTo>
-                  <a:pt x="1178" y="831"/>
-                </a:lnTo>
-                <a:lnTo>
-                  <a:pt x="1121" y="854"/>
-                </a:lnTo>
-                <a:lnTo>
-                  <a:pt x="1062" y="872"/>
-                </a:lnTo>
-                <a:lnTo>
-                  <a:pt x="1004" y="887"/>
-                </a:lnTo>
-                <a:lnTo>
-                  <a:pt x="946" y="898"/>
-                </a:lnTo>
-                <a:lnTo>
-                  <a:pt x="889" y="904"/>
-                </a:lnTo>
-                <a:lnTo>
-                  <a:pt x="832" y="907"/>
-                </a:lnTo>
-                <a:lnTo>
-                  <a:pt x="776" y="907"/>
-                </a:lnTo>
-                <a:lnTo>
-                  <a:pt x="721" y="902"/>
-                </a:lnTo>
-                <a:lnTo>
-                  <a:pt x="667" y="894"/>
-                </a:lnTo>
-                <a:lnTo>
-                  <a:pt x="615" y="883"/>
-                </a:lnTo>
-                <a:lnTo>
-                  <a:pt x="564" y="868"/>
-                </a:lnTo>
-                <a:lnTo>
-                  <a:pt x="515" y="849"/>
-                </a:lnTo>
-                <a:lnTo>
-                  <a:pt x="468" y="828"/>
-                </a:lnTo>
-                <a:lnTo>
-                  <a:pt x="423" y="803"/>
-                </a:lnTo>
-                <a:lnTo>
-                  <a:pt x="372" y="810"/>
-                </a:lnTo>
-                <a:lnTo>
-                  <a:pt x="324" y="808"/>
-                </a:lnTo>
-                <a:lnTo>
-                  <a:pt x="280" y="798"/>
-                </a:lnTo>
-                <a:lnTo>
-                  <a:pt x="241" y="781"/>
-                </a:lnTo>
-                <a:lnTo>
-                  <a:pt x="209" y="759"/>
-                </a:lnTo>
-                <a:lnTo>
-                  <a:pt x="183" y="732"/>
-                </a:lnTo>
-                <a:lnTo>
-                  <a:pt x="155" y="748"/>
-                </a:lnTo>
-                <a:lnTo>
-                  <a:pt x="121" y="759"/>
-                </a:lnTo>
-                <a:lnTo>
-                  <a:pt x="83" y="763"/>
-                </a:lnTo>
-                <a:lnTo>
-                  <a:pt x="42" y="759"/>
-                </a:lnTo>
-                <a:lnTo>
-                  <a:pt x="1" y="748"/>
-                </a:lnTo>
-                <a:lnTo>
-                  <a:pt x="0" y="699"/>
-                </a:lnTo>
-                <a:lnTo>
-                  <a:pt x="9" y="654"/>
-                </a:lnTo>
-                <a:lnTo>
-                  <a:pt x="27" y="616"/>
-                </a:lnTo>
-                <a:lnTo>
-                  <a:pt x="51" y="586"/>
-                </a:lnTo>
-                <a:lnTo>
-                  <a:pt x="81" y="565"/>
-                </a:lnTo>
-                <a:lnTo>
-                  <a:pt x="93" y="528"/>
-                </a:lnTo>
-                <a:lnTo>
-                  <a:pt x="118" y="499"/>
-                </a:lnTo>
-                <a:lnTo>
-                  <a:pt x="101" y="512"/>
-                </a:lnTo>
-                <a:lnTo>
-                  <a:pt x="88" y="529"/>
-                </a:lnTo>
-                <a:lnTo>
-                  <a:pt x="78" y="549"/>
-                </a:lnTo>
-                <a:lnTo>
-                  <a:pt x="72" y="572"/>
-                </a:lnTo>
-                <a:lnTo>
-                  <a:pt x="71" y="596"/>
-                </a:lnTo>
-                <a:lnTo>
-                  <a:pt x="76" y="621"/>
-                </a:lnTo>
-                <a:lnTo>
-                  <a:pt x="87" y="645"/>
-                </a:lnTo>
-                <a:lnTo>
-                  <a:pt x="103" y="668"/>
-                </a:lnTo>
-                <a:lnTo>
-                  <a:pt x="124" y="686"/>
-                </a:lnTo>
-                <a:lnTo>
-                  <a:pt x="150" y="701"/>
-                </a:lnTo>
-                <a:lnTo>
-                  <a:pt x="179" y="709"/>
-                </a:lnTo>
-                <a:lnTo>
-                  <a:pt x="210" y="711"/>
-                </a:lnTo>
-                <a:lnTo>
-                  <a:pt x="242" y="707"/>
-                </a:lnTo>
-                <a:lnTo>
-                  <a:pt x="273" y="695"/>
-                </a:lnTo>
-                <a:lnTo>
-                  <a:pt x="302" y="677"/>
-                </a:lnTo>
-                <a:lnTo>
-                  <a:pt x="327" y="652"/>
-                </a:lnTo>
-                <a:lnTo>
-                  <a:pt x="346" y="621"/>
-                </a:lnTo>
-                <a:lnTo>
-                  <a:pt x="360" y="586"/>
-                </a:lnTo>
-                <a:lnTo>
-                  <a:pt x="365" y="549"/>
-                </a:lnTo>
-                <a:lnTo>
-                  <a:pt x="362" y="510"/>
-                </a:lnTo>
-                <a:lnTo>
-                  <a:pt x="350" y="471"/>
-                </a:lnTo>
-                <a:lnTo>
-                  <a:pt x="330" y="436"/>
-                </a:lnTo>
-                <a:lnTo>
-                  <a:pt x="302" y="403"/>
-                </a:lnTo>
-                <a:lnTo>
-                  <a:pt x="267" y="378"/>
-                </a:lnTo>
-                <a:lnTo>
-                  <a:pt x="227" y="360"/>
-                </a:lnTo>
-                <a:lnTo>
-                  <a:pt x="183" y="350"/>
+                  <a:pt x="199" y="304"/>
+                </a:lnTo>
+                <a:lnTo>
+                  <a:pt x="218" y="264"/>
+                </a:lnTo>
+                <a:lnTo>
+                  <a:pt x="241" y="226"/>
+                </a:lnTo>
+                <a:lnTo>
+                  <a:pt x="269" y="189"/>
+                </a:lnTo>
+                <a:lnTo>
+                  <a:pt x="301" y="155"/>
+                </a:lnTo>
+                <a:lnTo>
+                  <a:pt x="337" y="123"/>
+                </a:lnTo>
+                <a:lnTo>
+                  <a:pt x="378" y="94"/>
+                </a:lnTo>
+                <a:lnTo>
+                  <a:pt x="422" y="69"/>
+                </a:lnTo>
+                <a:lnTo>
+                  <a:pt x="469" y="47"/>
+                </a:lnTo>
+                <a:lnTo>
+                  <a:pt x="519" y="29"/>
+                </a:lnTo>
+                <a:lnTo>
+                  <a:pt x="572" y="15"/>
+                </a:lnTo>
+                <a:lnTo>
+                  <a:pt x="627" y="5"/>
+                </a:lnTo>
+                <a:lnTo>
+                  <a:pt x="685" y="0"/>
+                </a:lnTo>
+                <a:lnTo>
+                  <a:pt x="745" y="0"/>
+                </a:lnTo>
+                <a:lnTo>
+                  <a:pt x="793" y="3"/>
+                </a:lnTo>
+                <a:lnTo>
+                  <a:pt x="841" y="9"/>
+                </a:lnTo>
+                <a:lnTo>
+                  <a:pt x="891" y="18"/>
+                </a:lnTo>
+                <a:lnTo>
+                  <a:pt x="940" y="31"/>
+                </a:lnTo>
+                <a:lnTo>
+                  <a:pt x="990" y="47"/>
+                </a:lnTo>
+                <a:lnTo>
+                  <a:pt x="1040" y="66"/>
+                </a:lnTo>
+                <a:lnTo>
+                  <a:pt x="1089" y="89"/>
+                </a:lnTo>
+                <a:lnTo>
+                  <a:pt x="1138" y="115"/>
+                </a:lnTo>
+                <a:lnTo>
+                  <a:pt x="1187" y="144"/>
+                </a:lnTo>
+                <a:lnTo>
+                  <a:pt x="1235" y="177"/>
+                </a:lnTo>
+                <a:lnTo>
+                  <a:pt x="1282" y="214"/>
+                </a:lnTo>
+                <a:lnTo>
+                  <a:pt x="1327" y="253"/>
+                </a:lnTo>
+                <a:lnTo>
+                  <a:pt x="1371" y="296"/>
+                </a:lnTo>
+                <a:lnTo>
+                  <a:pt x="1413" y="343"/>
+                </a:lnTo>
+                <a:lnTo>
+                  <a:pt x="1454" y="392"/>
+                </a:lnTo>
+                <a:lnTo>
+                  <a:pt x="1493" y="446"/>
+                </a:lnTo>
+                <a:lnTo>
+                  <a:pt x="1529" y="501"/>
+                </a:lnTo>
+                <a:lnTo>
+                  <a:pt x="1563" y="560"/>
+                </a:lnTo>
+                <a:lnTo>
+                  <a:pt x="1512" y="610"/>
+                </a:lnTo>
+                <a:lnTo>
+                  <a:pt x="1460" y="656"/>
+                </a:lnTo>
+                <a:lnTo>
+                  <a:pt x="1407" y="698"/>
+                </a:lnTo>
+                <a:lnTo>
+                  <a:pt x="1352" y="736"/>
+                </a:lnTo>
+                <a:lnTo>
+                  <a:pt x="1296" y="770"/>
+                </a:lnTo>
+                <a:lnTo>
+                  <a:pt x="1239" y="801"/>
+                </a:lnTo>
+                <a:lnTo>
+                  <a:pt x="1181" y="827"/>
+                </a:lnTo>
+                <a:lnTo>
+                  <a:pt x="1123" y="849"/>
+                </a:lnTo>
+                <a:lnTo>
+                  <a:pt x="1065" y="868"/>
+                </a:lnTo>
+                <a:lnTo>
+                  <a:pt x="1007" y="883"/>
+                </a:lnTo>
+                <a:lnTo>
+                  <a:pt x="949" y="893"/>
+                </a:lnTo>
+                <a:lnTo>
+                  <a:pt x="892" y="900"/>
+                </a:lnTo>
+                <a:lnTo>
+                  <a:pt x="835" y="903"/>
+                </a:lnTo>
+                <a:lnTo>
+                  <a:pt x="779" y="902"/>
+                </a:lnTo>
+                <a:lnTo>
+                  <a:pt x="723" y="898"/>
+                </a:lnTo>
+                <a:lnTo>
+                  <a:pt x="670" y="890"/>
+                </a:lnTo>
+                <a:lnTo>
+                  <a:pt x="617" y="879"/>
+                </a:lnTo>
+                <a:lnTo>
+                  <a:pt x="566" y="864"/>
+                </a:lnTo>
+                <a:lnTo>
+                  <a:pt x="517" y="846"/>
+                </a:lnTo>
+                <a:lnTo>
+                  <a:pt x="470" y="824"/>
+                </a:lnTo>
+                <a:lnTo>
+                  <a:pt x="425" y="800"/>
+                </a:lnTo>
+                <a:lnTo>
+                  <a:pt x="374" y="806"/>
+                </a:lnTo>
+                <a:lnTo>
+                  <a:pt x="325" y="804"/>
+                </a:lnTo>
+                <a:lnTo>
+                  <a:pt x="282" y="794"/>
+                </a:lnTo>
+                <a:lnTo>
+                  <a:pt x="243" y="778"/>
+                </a:lnTo>
+                <a:lnTo>
+                  <a:pt x="210" y="755"/>
+                </a:lnTo>
+                <a:lnTo>
+                  <a:pt x="184" y="729"/>
+                </a:lnTo>
+                <a:lnTo>
+                  <a:pt x="155" y="745"/>
+                </a:lnTo>
+                <a:lnTo>
+                  <a:pt x="121" y="755"/>
+                </a:lnTo>
+                <a:lnTo>
+                  <a:pt x="83" y="759"/>
+                </a:lnTo>
+                <a:lnTo>
+                  <a:pt x="42" y="756"/>
+                </a:lnTo>
+                <a:lnTo>
+                  <a:pt x="1" y="744"/>
+                </a:lnTo>
+                <a:lnTo>
+                  <a:pt x="0" y="694"/>
+                </a:lnTo>
+                <a:lnTo>
+                  <a:pt x="9" y="650"/>
+                </a:lnTo>
+                <a:lnTo>
+                  <a:pt x="27" y="611"/>
+                </a:lnTo>
+                <a:lnTo>
+                  <a:pt x="52" y="581"/>
+                </a:lnTo>
+                <a:lnTo>
+                  <a:pt x="82" y="560"/>
+                </a:lnTo>
+                <a:lnTo>
+                  <a:pt x="94" y="523"/>
+                </a:lnTo>
+                <a:lnTo>
+                  <a:pt x="119" y="495"/>
+                </a:lnTo>
+                <a:lnTo>
+                  <a:pt x="103" y="507"/>
+                </a:lnTo>
+                <a:lnTo>
+                  <a:pt x="89" y="524"/>
+                </a:lnTo>
+                <a:lnTo>
+                  <a:pt x="79" y="544"/>
+                </a:lnTo>
+                <a:lnTo>
+                  <a:pt x="73" y="567"/>
+                </a:lnTo>
+                <a:lnTo>
+                  <a:pt x="73" y="591"/>
+                </a:lnTo>
+                <a:lnTo>
+                  <a:pt x="78" y="616"/>
+                </a:lnTo>
+                <a:lnTo>
+                  <a:pt x="88" y="640"/>
+                </a:lnTo>
+                <a:lnTo>
+                  <a:pt x="104" y="663"/>
+                </a:lnTo>
+                <a:lnTo>
+                  <a:pt x="125" y="681"/>
+                </a:lnTo>
+                <a:lnTo>
+                  <a:pt x="151" y="695"/>
+                </a:lnTo>
+                <a:lnTo>
+                  <a:pt x="180" y="704"/>
+                </a:lnTo>
+                <a:lnTo>
+                  <a:pt x="211" y="706"/>
+                </a:lnTo>
+                <a:lnTo>
+                  <a:pt x="243" y="702"/>
+                </a:lnTo>
+                <a:lnTo>
+                  <a:pt x="274" y="690"/>
+                </a:lnTo>
+                <a:lnTo>
+                  <a:pt x="303" y="672"/>
+                </a:lnTo>
+                <a:lnTo>
+                  <a:pt x="328" y="647"/>
+                </a:lnTo>
+                <a:lnTo>
+                  <a:pt x="347" y="616"/>
+                </a:lnTo>
+                <a:lnTo>
+                  <a:pt x="360" y="582"/>
+                </a:lnTo>
+                <a:lnTo>
+                  <a:pt x="367" y="544"/>
+                </a:lnTo>
+                <a:lnTo>
+                  <a:pt x="363" y="505"/>
+                </a:lnTo>
+                <a:lnTo>
+                  <a:pt x="351" y="466"/>
+                </a:lnTo>
+                <a:lnTo>
+                  <a:pt x="331" y="430"/>
+                </a:lnTo>
+                <a:lnTo>
+                  <a:pt x="303" y="398"/>
+                </a:lnTo>
+                <a:lnTo>
+                  <a:pt x="269" y="372"/>
+                </a:lnTo>
+                <a:lnTo>
+                  <a:pt x="229" y="354"/>
+                </a:lnTo>
+                <a:lnTo>
+                  <a:pt x="184" y="344"/>
                 </a:lnTo>
                 <a:close/>
               </a:path>
@@ -5873,7 +5873,7 @@
         </p:nvSpPr>
         <p:spPr>
           <a:xfrm>
-            <a:off x="1320120" y="1418400"/>
+            <a:off x="1320120" y="1418040"/>
             <a:ext cx="42120" cy="42120"/>
           </a:xfrm>
           <a:custGeom>
@@ -5884,17 +5884,17 @@
             <a:pathLst>
               <a:path w="117" h="117">
                 <a:moveTo>
-                  <a:pt x="0" y="58"/>
+                  <a:pt x="0" y="59"/>
                 </a:moveTo>
                 <a:cubicBezTo>
                   <a:pt x="0" y="-19"/>
                   <a:pt x="117" y="-19"/>
-                  <a:pt x="117" y="58"/>
+                  <a:pt x="117" y="59"/>
                 </a:cubicBezTo>
                 <a:cubicBezTo>
                   <a:pt x="117" y="137"/>
                   <a:pt x="0" y="137"/>
-                  <a:pt x="0" y="58"/>
+                  <a:pt x="0" y="59"/>
                 </a:cubicBezTo>
                 <a:close/>
               </a:path>
@@ -5931,7 +5931,7 @@
         </p:nvSpPr>
         <p:spPr>
           <a:xfrm>
-            <a:off x="1320120" y="1418400"/>
+            <a:off x="1320120" y="1418040"/>
             <a:ext cx="42120" cy="42120"/>
           </a:xfrm>
           <a:custGeom>
@@ -5942,17 +5942,17 @@
             <a:pathLst>
               <a:path fill="none" w="117" h="117">
                 <a:moveTo>
-                  <a:pt x="117" y="58"/>
+                  <a:pt x="117" y="59"/>
                 </a:moveTo>
                 <a:cubicBezTo>
                   <a:pt x="117" y="137"/>
                   <a:pt x="0" y="137"/>
-                  <a:pt x="0" y="58"/>
+                  <a:pt x="0" y="59"/>
                 </a:cubicBezTo>
                 <a:cubicBezTo>
                   <a:pt x="0" y="-19"/>
                   <a:pt x="117" y="-19"/>
-                  <a:pt x="117" y="58"/>
+                  <a:pt x="117" y="59"/>
                 </a:cubicBezTo>
               </a:path>
             </a:pathLst>
@@ -5988,7 +5988,7 @@
         </p:nvSpPr>
         <p:spPr>
           <a:xfrm>
-            <a:off x="1523520" y="1292400"/>
+            <a:off x="1521720" y="1294200"/>
             <a:ext cx="42120" cy="42120"/>
           </a:xfrm>
           <a:custGeom>
@@ -6046,7 +6046,7 @@
         </p:nvSpPr>
         <p:spPr>
           <a:xfrm>
-            <a:off x="1523520" y="1292400"/>
+            <a:off x="1521720" y="1294200"/>
             <a:ext cx="42120" cy="42120"/>
           </a:xfrm>
           <a:custGeom>
@@ -6103,7 +6103,7 @@
         </p:nvSpPr>
         <p:spPr>
           <a:xfrm>
-            <a:off x="1815120" y="1495440"/>
+            <a:off x="1816200" y="1495440"/>
             <a:ext cx="42120" cy="41760"/>
           </a:xfrm>
           <a:custGeom>
@@ -6161,7 +6161,7 @@
         </p:nvSpPr>
         <p:spPr>
           <a:xfrm>
-            <a:off x="1815120" y="1495440"/>
+            <a:off x="1816200" y="1495440"/>
             <a:ext cx="42120" cy="41760"/>
           </a:xfrm>
           <a:custGeom>
@@ -6218,7 +6218,7 @@
         </p:nvSpPr>
         <p:spPr>
           <a:xfrm>
-            <a:off x="1406160" y="1581120"/>
+            <a:off x="1406520" y="1581840"/>
             <a:ext cx="42120" cy="42120"/>
           </a:xfrm>
           <a:custGeom>
@@ -6229,17 +6229,17 @@
             <a:pathLst>
               <a:path w="117" h="117">
                 <a:moveTo>
-                  <a:pt x="0" y="58"/>
+                  <a:pt x="0" y="59"/>
                 </a:moveTo>
                 <a:cubicBezTo>
-                  <a:pt x="0" y="-19"/>
-                  <a:pt x="117" y="-19"/>
-                  <a:pt x="117" y="58"/>
-                </a:cubicBezTo>
-                <a:cubicBezTo>
-                  <a:pt x="117" y="137"/>
-                  <a:pt x="0" y="137"/>
-                  <a:pt x="0" y="58"/>
+                  <a:pt x="0" y="-20"/>
+                  <a:pt x="117" y="-20"/>
+                  <a:pt x="117" y="59"/>
+                </a:cubicBezTo>
+                <a:cubicBezTo>
+                  <a:pt x="117" y="136"/>
+                  <a:pt x="0" y="136"/>
+                  <a:pt x="0" y="59"/>
                 </a:cubicBezTo>
                 <a:close/>
               </a:path>
@@ -6276,7 +6276,7 @@
         </p:nvSpPr>
         <p:spPr>
           <a:xfrm>
-            <a:off x="1406160" y="1581120"/>
+            <a:off x="1406520" y="1581840"/>
             <a:ext cx="42120" cy="42120"/>
           </a:xfrm>
           <a:custGeom>
@@ -6287,17 +6287,17 @@
             <a:pathLst>
               <a:path fill="none" w="117" h="117">
                 <a:moveTo>
-                  <a:pt x="117" y="58"/>
+                  <a:pt x="117" y="59"/>
                 </a:moveTo>
                 <a:cubicBezTo>
-                  <a:pt x="117" y="137"/>
-                  <a:pt x="0" y="137"/>
-                  <a:pt x="0" y="58"/>
-                </a:cubicBezTo>
-                <a:cubicBezTo>
-                  <a:pt x="0" y="-19"/>
-                  <a:pt x="117" y="-19"/>
-                  <a:pt x="117" y="58"/>
+                  <a:pt x="117" y="136"/>
+                  <a:pt x="0" y="136"/>
+                  <a:pt x="0" y="59"/>
+                </a:cubicBezTo>
+                <a:cubicBezTo>
+                  <a:pt x="0" y="-20"/>
+                  <a:pt x="117" y="-20"/>
+                  <a:pt x="117" y="59"/>
                 </a:cubicBezTo>
               </a:path>
             </a:pathLst>
@@ -6333,7 +6333,7 @@
         </p:nvSpPr>
         <p:spPr>
           <a:xfrm>
-            <a:off x="1320120" y="1555560"/>
+            <a:off x="1320120" y="1556280"/>
             <a:ext cx="42120" cy="42120"/>
           </a:xfrm>
           <a:custGeom>
@@ -6347,13 +6347,13 @@
                   <a:pt x="0" y="59"/>
                 </a:moveTo>
                 <a:cubicBezTo>
-                  <a:pt x="0" y="-19"/>
-                  <a:pt x="117" y="-19"/>
+                  <a:pt x="0" y="-20"/>
+                  <a:pt x="117" y="-20"/>
                   <a:pt x="117" y="59"/>
                 </a:cubicBezTo>
                 <a:cubicBezTo>
-                  <a:pt x="117" y="137"/>
-                  <a:pt x="0" y="137"/>
+                  <a:pt x="117" y="136"/>
+                  <a:pt x="0" y="136"/>
                   <a:pt x="0" y="59"/>
                 </a:cubicBezTo>
                 <a:close/>
@@ -6391,7 +6391,7 @@
         </p:nvSpPr>
         <p:spPr>
           <a:xfrm>
-            <a:off x="1320120" y="1555560"/>
+            <a:off x="1320120" y="1556280"/>
             <a:ext cx="42120" cy="42120"/>
           </a:xfrm>
           <a:custGeom>
@@ -6405,13 +6405,13 @@
                   <a:pt x="117" y="59"/>
                 </a:moveTo>
                 <a:cubicBezTo>
-                  <a:pt x="117" y="137"/>
-                  <a:pt x="0" y="137"/>
+                  <a:pt x="117" y="136"/>
+                  <a:pt x="0" y="136"/>
                   <a:pt x="0" y="59"/>
                 </a:cubicBezTo>
                 <a:cubicBezTo>
-                  <a:pt x="0" y="-19"/>
-                  <a:pt x="117" y="-19"/>
+                  <a:pt x="0" y="-20"/>
+                  <a:pt x="117" y="-20"/>
                   <a:pt x="117" y="59"/>
                 </a:cubicBezTo>
               </a:path>
@@ -6448,7 +6448,7 @@
         </p:nvSpPr>
         <p:spPr>
           <a:xfrm>
-            <a:off x="1254600" y="1561320"/>
+            <a:off x="1254240" y="1561680"/>
             <a:ext cx="42120" cy="42120"/>
           </a:xfrm>
           <a:custGeom>
@@ -6506,7 +6506,7 @@
         </p:nvSpPr>
         <p:spPr>
           <a:xfrm>
-            <a:off x="1254600" y="1561320"/>
+            <a:off x="1254240" y="1561680"/>
             <a:ext cx="42120" cy="42120"/>
           </a:xfrm>
           <a:custGeom>
@@ -6678,8 +6678,8 @@
         </p:nvSpPr>
         <p:spPr>
           <a:xfrm>
-            <a:off x="1296720" y="1471680"/>
-            <a:ext cx="42120" cy="42480"/>
+            <a:off x="1296720" y="1472040"/>
+            <a:ext cx="42120" cy="42120"/>
           </a:xfrm>
           <a:custGeom>
             <a:avLst/>
@@ -6687,18 +6687,18 @@
             <a:ahLst/>
             <a:rect l="0" t="0" r="r" b="b"/>
             <a:pathLst>
-              <a:path w="117" h="118">
+              <a:path w="117" h="117">
                 <a:moveTo>
                   <a:pt x="0" y="59"/>
                 </a:moveTo>
                 <a:cubicBezTo>
-                  <a:pt x="0" y="-19"/>
-                  <a:pt x="117" y="-19"/>
+                  <a:pt x="0" y="-20"/>
+                  <a:pt x="117" y="-20"/>
                   <a:pt x="117" y="59"/>
                 </a:cubicBezTo>
                 <a:cubicBezTo>
-                  <a:pt x="117" y="138"/>
-                  <a:pt x="0" y="138"/>
+                  <a:pt x="117" y="136"/>
+                  <a:pt x="0" y="136"/>
                   <a:pt x="0" y="59"/>
                 </a:cubicBezTo>
                 <a:close/>
@@ -6736,8 +6736,8 @@
         </p:nvSpPr>
         <p:spPr>
           <a:xfrm>
-            <a:off x="1296720" y="1471680"/>
-            <a:ext cx="42120" cy="42480"/>
+            <a:off x="1296720" y="1472040"/>
+            <a:ext cx="42120" cy="42120"/>
           </a:xfrm>
           <a:custGeom>
             <a:avLst/>
@@ -6745,18 +6745,18 @@
             <a:ahLst/>
             <a:rect l="0" t="0" r="r" b="b"/>
             <a:pathLst>
-              <a:path fill="none" w="117" h="118">
+              <a:path fill="none" w="117" h="117">
                 <a:moveTo>
                   <a:pt x="117" y="59"/>
                 </a:moveTo>
                 <a:cubicBezTo>
-                  <a:pt x="117" y="138"/>
-                  <a:pt x="0" y="138"/>
+                  <a:pt x="117" y="136"/>
+                  <a:pt x="0" y="136"/>
                   <a:pt x="0" y="59"/>
                 </a:cubicBezTo>
                 <a:cubicBezTo>
-                  <a:pt x="0" y="-19"/>
-                  <a:pt x="117" y="-19"/>
+                  <a:pt x="0" y="-20"/>
+                  <a:pt x="117" y="-20"/>
                   <a:pt x="117" y="59"/>
                 </a:cubicBezTo>
               </a:path>
@@ -7756,7 +7756,7 @@
         </p:nvSpPr>
         <p:spPr>
           <a:xfrm>
-            <a:off x="2748240" y="1576080"/>
+            <a:off x="2748240" y="1500480"/>
             <a:ext cx="1580400" cy="0"/>
           </a:xfrm>
           <a:prstGeom prst="line">
@@ -7799,8 +7799,8 @@
         </p:nvSpPr>
         <p:spPr>
           <a:xfrm flipV="1">
-            <a:off x="2837160" y="1118880"/>
-            <a:ext cx="0" cy="975960"/>
+            <a:off x="2837160" y="1077480"/>
+            <a:ext cx="0" cy="903240"/>
           </a:xfrm>
           <a:prstGeom prst="line">
             <a:avLst/>
@@ -7844,8 +7844,8 @@
         </p:nvSpPr>
         <p:spPr>
           <a:xfrm flipV="1">
-            <a:off x="3030120" y="1348560"/>
-            <a:ext cx="0" cy="468360"/>
+            <a:off x="3030120" y="1289880"/>
+            <a:ext cx="0" cy="433440"/>
           </a:xfrm>
           <a:prstGeom prst="line">
             <a:avLst/>
@@ -7889,8 +7889,8 @@
         </p:nvSpPr>
         <p:spPr>
           <a:xfrm flipV="1">
-            <a:off x="3222720" y="1422000"/>
-            <a:ext cx="0" cy="316440"/>
+            <a:off x="3222720" y="1357920"/>
+            <a:ext cx="0" cy="293040"/>
           </a:xfrm>
           <a:prstGeom prst="line">
             <a:avLst/>
@@ -7934,8 +7934,8 @@
         </p:nvSpPr>
         <p:spPr>
           <a:xfrm flipV="1">
-            <a:off x="3415680" y="1175760"/>
-            <a:ext cx="0" cy="843120"/>
+            <a:off x="3415680" y="1130040"/>
+            <a:ext cx="0" cy="780480"/>
           </a:xfrm>
           <a:prstGeom prst="line">
             <a:avLst/>
@@ -7979,8 +7979,8 @@
         </p:nvSpPr>
         <p:spPr>
           <a:xfrm flipV="1">
-            <a:off x="3608280" y="993240"/>
-            <a:ext cx="0" cy="1248840"/>
+            <a:off x="3608280" y="960840"/>
+            <a:ext cx="0" cy="1156320"/>
           </a:xfrm>
           <a:prstGeom prst="line">
             <a:avLst/>
@@ -8024,8 +8024,8 @@
         </p:nvSpPr>
         <p:spPr>
           <a:xfrm flipV="1">
-            <a:off x="3800880" y="1254240"/>
-            <a:ext cx="0" cy="712800"/>
+            <a:off x="3800880" y="1202760"/>
+            <a:ext cx="0" cy="659520"/>
           </a:xfrm>
           <a:prstGeom prst="line">
             <a:avLst/>
@@ -8069,8 +8069,8 @@
         </p:nvSpPr>
         <p:spPr>
           <a:xfrm flipV="1">
-            <a:off x="3993840" y="839880"/>
-            <a:ext cx="0" cy="1575360"/>
+            <a:off x="3993840" y="819000"/>
+            <a:ext cx="0" cy="1458360"/>
           </a:xfrm>
           <a:prstGeom prst="line">
             <a:avLst/>
@@ -8114,8 +8114,8 @@
         </p:nvSpPr>
         <p:spPr>
           <a:xfrm flipV="1">
-            <a:off x="4186440" y="930240"/>
-            <a:ext cx="0" cy="1512000"/>
+            <a:off x="4186440" y="902880"/>
+            <a:ext cx="0" cy="1399680"/>
           </a:xfrm>
           <a:prstGeom prst="line">
             <a:avLst/>
@@ -8159,8 +8159,8 @@
         </p:nvSpPr>
         <p:spPr>
           <a:xfrm flipV="1">
-            <a:off x="2890080" y="1144080"/>
-            <a:ext cx="0" cy="975600"/>
+            <a:off x="2890080" y="1030320"/>
+            <a:ext cx="0" cy="980280"/>
           </a:xfrm>
           <a:prstGeom prst="line">
             <a:avLst/>
@@ -8204,8 +8204,8 @@
         </p:nvSpPr>
         <p:spPr>
           <a:xfrm flipV="1">
-            <a:off x="3083040" y="1361520"/>
-            <a:ext cx="0" cy="426240"/>
+            <a:off x="3083040" y="1296360"/>
+            <a:ext cx="0" cy="426600"/>
           </a:xfrm>
           <a:prstGeom prst="line">
             <a:avLst/>
@@ -8249,8 +8249,8 @@
         </p:nvSpPr>
         <p:spPr>
           <a:xfrm flipV="1">
-            <a:off x="3275640" y="1431000"/>
-            <a:ext cx="0" cy="298080"/>
+            <a:off x="3275640" y="1362240"/>
+            <a:ext cx="0" cy="266760"/>
           </a:xfrm>
           <a:prstGeom prst="line">
             <a:avLst/>
@@ -8294,8 +8294,8 @@
         </p:nvSpPr>
         <p:spPr>
           <a:xfrm flipV="1">
-            <a:off x="3468600" y="1251000"/>
-            <a:ext cx="0" cy="758880"/>
+            <a:off x="3468600" y="1184040"/>
+            <a:ext cx="0" cy="690120"/>
           </a:xfrm>
           <a:prstGeom prst="line">
             <a:avLst/>
@@ -8339,8 +8339,8 @@
         </p:nvSpPr>
         <p:spPr>
           <a:xfrm flipV="1">
-            <a:off x="3661200" y="1096560"/>
-            <a:ext cx="0" cy="1114560"/>
+            <a:off x="3661200" y="1072800"/>
+            <a:ext cx="0" cy="1031760"/>
           </a:xfrm>
           <a:prstGeom prst="line">
             <a:avLst/>
@@ -8384,8 +8384,8 @@
         </p:nvSpPr>
         <p:spPr>
           <a:xfrm flipV="1">
-            <a:off x="3854160" y="1231200"/>
-            <a:ext cx="0" cy="706320"/>
+            <a:off x="3854160" y="1161720"/>
+            <a:ext cx="0" cy="686160"/>
           </a:xfrm>
           <a:prstGeom prst="line">
             <a:avLst/>
@@ -8429,8 +8429,8 @@
         </p:nvSpPr>
         <p:spPr>
           <a:xfrm flipV="1">
-            <a:off x="4046760" y="889560"/>
-            <a:ext cx="0" cy="1769400"/>
+            <a:off x="4046760" y="792000"/>
+            <a:ext cx="0" cy="1711080"/>
           </a:xfrm>
           <a:prstGeom prst="line">
             <a:avLst/>
@@ -8474,8 +8474,8 @@
         </p:nvSpPr>
         <p:spPr>
           <a:xfrm flipV="1">
-            <a:off x="4239720" y="757800"/>
-            <a:ext cx="0" cy="1876320"/>
+            <a:off x="4239720" y="729360"/>
+            <a:ext cx="0" cy="1929600"/>
           </a:xfrm>
           <a:prstGeom prst="line">
             <a:avLst/>
@@ -8519,8 +8519,8 @@
         </p:nvSpPr>
         <p:spPr>
           <a:xfrm>
-            <a:off x="2806200" y="1610640"/>
-            <a:ext cx="62640" cy="62640"/>
+            <a:off x="2806200" y="1530360"/>
+            <a:ext cx="62640" cy="63000"/>
           </a:xfrm>
           <a:custGeom>
             <a:avLst/>
@@ -8528,19 +8528,19 @@
             <a:ahLst/>
             <a:rect l="0" t="0" r="r" b="b"/>
             <a:pathLst>
-              <a:path w="174" h="174">
+              <a:path w="174" h="175">
                 <a:moveTo>
-                  <a:pt x="0" y="86"/>
+                  <a:pt x="0" y="87"/>
                 </a:moveTo>
                 <a:cubicBezTo>
                   <a:pt x="0" y="-29"/>
                   <a:pt x="174" y="-29"/>
-                  <a:pt x="174" y="86"/>
-                </a:cubicBezTo>
-                <a:cubicBezTo>
-                  <a:pt x="174" y="203"/>
-                  <a:pt x="0" y="203"/>
-                  <a:pt x="0" y="86"/>
+                  <a:pt x="174" y="87"/>
+                </a:cubicBezTo>
+                <a:cubicBezTo>
+                  <a:pt x="174" y="204"/>
+                  <a:pt x="0" y="204"/>
+                  <a:pt x="0" y="87"/>
                 </a:cubicBezTo>
                 <a:close/>
               </a:path>
@@ -8577,8 +8577,8 @@
         </p:nvSpPr>
         <p:spPr>
           <a:xfrm>
-            <a:off x="2806200" y="1610640"/>
-            <a:ext cx="62640" cy="62640"/>
+            <a:off x="2806200" y="1530360"/>
+            <a:ext cx="62640" cy="63000"/>
           </a:xfrm>
           <a:custGeom>
             <a:avLst/>
@@ -8586,19 +8586,19 @@
             <a:ahLst/>
             <a:rect l="0" t="0" r="r" b="b"/>
             <a:pathLst>
-              <a:path fill="none" w="174" h="174">
+              <a:path fill="none" w="174" h="175">
                 <a:moveTo>
-                  <a:pt x="174" y="86"/>
+                  <a:pt x="174" y="87"/>
                 </a:moveTo>
                 <a:cubicBezTo>
-                  <a:pt x="174" y="203"/>
-                  <a:pt x="0" y="203"/>
-                  <a:pt x="0" y="86"/>
+                  <a:pt x="174" y="204"/>
+                  <a:pt x="0" y="204"/>
+                  <a:pt x="0" y="87"/>
                 </a:cubicBezTo>
                 <a:cubicBezTo>
                   <a:pt x="0" y="-29"/>
                   <a:pt x="174" y="-29"/>
-                  <a:pt x="174" y="86"/>
+                  <a:pt x="174" y="87"/>
                 </a:cubicBezTo>
               </a:path>
             </a:pathLst>
@@ -8634,7 +8634,7 @@
         </p:nvSpPr>
         <p:spPr>
           <a:xfrm>
-            <a:off x="2998800" y="1280520"/>
+            <a:off x="2998800" y="1224720"/>
             <a:ext cx="62640" cy="63000"/>
           </a:xfrm>
           <a:custGeom>
@@ -8692,7 +8692,7 @@
         </p:nvSpPr>
         <p:spPr>
           <a:xfrm>
-            <a:off x="2998800" y="1280520"/>
+            <a:off x="2998800" y="1224720"/>
             <a:ext cx="62640" cy="63000"/>
           </a:xfrm>
           <a:custGeom>
@@ -8749,8 +8749,8 @@
         </p:nvSpPr>
         <p:spPr>
           <a:xfrm>
-            <a:off x="3191760" y="1524600"/>
-            <a:ext cx="62640" cy="63000"/>
+            <a:off x="3191760" y="1450800"/>
+            <a:ext cx="62640" cy="62280"/>
           </a:xfrm>
           <a:custGeom>
             <a:avLst/>
@@ -8758,19 +8758,19 @@
             <a:ahLst/>
             <a:rect l="0" t="0" r="r" b="b"/>
             <a:pathLst>
-              <a:path w="174" h="175">
+              <a:path w="174" h="173">
                 <a:moveTo>
-                  <a:pt x="0" y="88"/>
+                  <a:pt x="0" y="87"/>
                 </a:moveTo>
                 <a:cubicBezTo>
                   <a:pt x="0" y="-29"/>
                   <a:pt x="174" y="-29"/>
-                  <a:pt x="174" y="88"/>
-                </a:cubicBezTo>
-                <a:cubicBezTo>
-                  <a:pt x="174" y="204"/>
-                  <a:pt x="0" y="204"/>
-                  <a:pt x="0" y="88"/>
+                  <a:pt x="174" y="87"/>
+                </a:cubicBezTo>
+                <a:cubicBezTo>
+                  <a:pt x="174" y="202"/>
+                  <a:pt x="0" y="202"/>
+                  <a:pt x="0" y="87"/>
                 </a:cubicBezTo>
                 <a:close/>
               </a:path>
@@ -8807,8 +8807,8 @@
         </p:nvSpPr>
         <p:spPr>
           <a:xfrm>
-            <a:off x="3191760" y="1524600"/>
-            <a:ext cx="62640" cy="63000"/>
+            <a:off x="3191760" y="1450800"/>
+            <a:ext cx="62640" cy="62280"/>
           </a:xfrm>
           <a:custGeom>
             <a:avLst/>
@@ -8816,19 +8816,19 @@
             <a:ahLst/>
             <a:rect l="0" t="0" r="r" b="b"/>
             <a:pathLst>
-              <a:path fill="none" w="174" h="175">
+              <a:path fill="none" w="174" h="173">
                 <a:moveTo>
-                  <a:pt x="174" y="88"/>
+                  <a:pt x="174" y="87"/>
                 </a:moveTo>
                 <a:cubicBezTo>
-                  <a:pt x="174" y="204"/>
-                  <a:pt x="0" y="204"/>
-                  <a:pt x="0" y="88"/>
+                  <a:pt x="174" y="202"/>
+                  <a:pt x="0" y="202"/>
+                  <a:pt x="0" y="87"/>
                 </a:cubicBezTo>
                 <a:cubicBezTo>
                   <a:pt x="0" y="-29"/>
                   <a:pt x="174" y="-29"/>
-                  <a:pt x="174" y="88"/>
+                  <a:pt x="174" y="87"/>
                 </a:cubicBezTo>
               </a:path>
             </a:pathLst>
@@ -8864,7 +8864,7 @@
         </p:nvSpPr>
         <p:spPr>
           <a:xfrm>
-            <a:off x="3384360" y="2029320"/>
+            <a:off x="3384360" y="1917720"/>
             <a:ext cx="62640" cy="62640"/>
           </a:xfrm>
           <a:custGeom>
@@ -8922,7 +8922,7 @@
         </p:nvSpPr>
         <p:spPr>
           <a:xfrm>
-            <a:off x="3384360" y="2029320"/>
+            <a:off x="3384360" y="1917720"/>
             <a:ext cx="62640" cy="62640"/>
           </a:xfrm>
           <a:custGeom>
@@ -8979,8 +8979,8 @@
         </p:nvSpPr>
         <p:spPr>
           <a:xfrm>
-            <a:off x="3576960" y="2418840"/>
-            <a:ext cx="62640" cy="62640"/>
+            <a:off x="3576960" y="2278440"/>
+            <a:ext cx="62640" cy="63000"/>
           </a:xfrm>
           <a:custGeom>
             <a:avLst/>
@@ -8988,19 +8988,19 @@
             <a:ahLst/>
             <a:rect l="0" t="0" r="r" b="b"/>
             <a:pathLst>
-              <a:path w="174" h="174">
+              <a:path w="174" h="175">
                 <a:moveTo>
-                  <a:pt x="0" y="87"/>
+                  <a:pt x="0" y="88"/>
                 </a:moveTo>
                 <a:cubicBezTo>
                   <a:pt x="0" y="-29"/>
                   <a:pt x="174" y="-29"/>
-                  <a:pt x="174" y="87"/>
-                </a:cubicBezTo>
-                <a:cubicBezTo>
-                  <a:pt x="174" y="203"/>
-                  <a:pt x="0" y="203"/>
-                  <a:pt x="0" y="87"/>
+                  <a:pt x="174" y="88"/>
+                </a:cubicBezTo>
+                <a:cubicBezTo>
+                  <a:pt x="174" y="204"/>
+                  <a:pt x="0" y="204"/>
+                  <a:pt x="0" y="88"/>
                 </a:cubicBezTo>
                 <a:close/>
               </a:path>
@@ -9037,8 +9037,8 @@
         </p:nvSpPr>
         <p:spPr>
           <a:xfrm>
-            <a:off x="3576960" y="2418840"/>
-            <a:ext cx="62640" cy="62640"/>
+            <a:off x="3576960" y="2278440"/>
+            <a:ext cx="62640" cy="63000"/>
           </a:xfrm>
           <a:custGeom>
             <a:avLst/>
@@ -9046,19 +9046,19 @@
             <a:ahLst/>
             <a:rect l="0" t="0" r="r" b="b"/>
             <a:pathLst>
-              <a:path fill="none" w="174" h="174">
+              <a:path fill="none" w="174" h="175">
                 <a:moveTo>
-                  <a:pt x="174" y="87"/>
+                  <a:pt x="174" y="88"/>
                 </a:moveTo>
                 <a:cubicBezTo>
-                  <a:pt x="174" y="203"/>
-                  <a:pt x="0" y="203"/>
-                  <a:pt x="0" y="87"/>
+                  <a:pt x="174" y="204"/>
+                  <a:pt x="0" y="204"/>
+                  <a:pt x="0" y="88"/>
                 </a:cubicBezTo>
                 <a:cubicBezTo>
                   <a:pt x="0" y="-29"/>
                   <a:pt x="174" y="-29"/>
-                  <a:pt x="174" y="87"/>
+                  <a:pt x="174" y="88"/>
                 </a:cubicBezTo>
               </a:path>
             </a:pathLst>
@@ -9094,7 +9094,7 @@
         </p:nvSpPr>
         <p:spPr>
           <a:xfrm>
-            <a:off x="3769920" y="1409760"/>
+            <a:off x="3769920" y="1344240"/>
             <a:ext cx="62640" cy="63000"/>
           </a:xfrm>
           <a:custGeom>
@@ -9105,17 +9105,17 @@
             <a:pathLst>
               <a:path w="174" h="175">
                 <a:moveTo>
-                  <a:pt x="0" y="87"/>
+                  <a:pt x="0" y="88"/>
                 </a:moveTo>
                 <a:cubicBezTo>
                   <a:pt x="0" y="-29"/>
                   <a:pt x="174" y="-29"/>
-                  <a:pt x="174" y="87"/>
+                  <a:pt x="174" y="88"/>
                 </a:cubicBezTo>
                 <a:cubicBezTo>
                   <a:pt x="174" y="204"/>
                   <a:pt x="0" y="204"/>
-                  <a:pt x="0" y="87"/>
+                  <a:pt x="0" y="88"/>
                 </a:cubicBezTo>
                 <a:close/>
               </a:path>
@@ -9152,7 +9152,7 @@
         </p:nvSpPr>
         <p:spPr>
           <a:xfrm>
-            <a:off x="3769920" y="1409760"/>
+            <a:off x="3769920" y="1344240"/>
             <a:ext cx="62640" cy="63000"/>
           </a:xfrm>
           <a:custGeom>
@@ -9163,17 +9163,17 @@
             <a:pathLst>
               <a:path fill="none" w="174" h="175">
                 <a:moveTo>
-                  <a:pt x="174" y="87"/>
+                  <a:pt x="174" y="88"/>
                 </a:moveTo>
                 <a:cubicBezTo>
                   <a:pt x="174" y="204"/>
                   <a:pt x="0" y="204"/>
-                  <a:pt x="0" y="87"/>
+                  <a:pt x="0" y="88"/>
                 </a:cubicBezTo>
                 <a:cubicBezTo>
                   <a:pt x="0" y="-29"/>
                   <a:pt x="174" y="-29"/>
-                  <a:pt x="174" y="87"/>
+                  <a:pt x="174" y="88"/>
                 </a:cubicBezTo>
               </a:path>
             </a:pathLst>
@@ -9209,8 +9209,8 @@
         </p:nvSpPr>
         <p:spPr>
           <a:xfrm>
-            <a:off x="3962520" y="2141280"/>
-            <a:ext cx="62640" cy="62640"/>
+            <a:off x="3962520" y="2021760"/>
+            <a:ext cx="62640" cy="63000"/>
           </a:xfrm>
           <a:custGeom>
             <a:avLst/>
@@ -9218,7 +9218,7 @@
             <a:ahLst/>
             <a:rect l="0" t="0" r="r" b="b"/>
             <a:pathLst>
-              <a:path w="174" h="174">
+              <a:path w="174" h="175">
                 <a:moveTo>
                   <a:pt x="0" y="87"/>
                 </a:moveTo>
@@ -9228,8 +9228,8 @@
                   <a:pt x="174" y="87"/>
                 </a:cubicBezTo>
                 <a:cubicBezTo>
-                  <a:pt x="174" y="203"/>
-                  <a:pt x="0" y="203"/>
+                  <a:pt x="174" y="204"/>
+                  <a:pt x="0" y="204"/>
                   <a:pt x="0" y="87"/>
                 </a:cubicBezTo>
                 <a:close/>
@@ -9267,8 +9267,8 @@
         </p:nvSpPr>
         <p:spPr>
           <a:xfrm>
-            <a:off x="3962520" y="2141280"/>
-            <a:ext cx="62640" cy="62640"/>
+            <a:off x="3962520" y="2021760"/>
+            <a:ext cx="62640" cy="63000"/>
           </a:xfrm>
           <a:custGeom>
             <a:avLst/>
@@ -9276,13 +9276,13 @@
             <a:ahLst/>
             <a:rect l="0" t="0" r="r" b="b"/>
             <a:pathLst>
-              <a:path fill="none" w="174" h="174">
+              <a:path fill="none" w="174" h="175">
                 <a:moveTo>
                   <a:pt x="174" y="87"/>
                 </a:moveTo>
                 <a:cubicBezTo>
-                  <a:pt x="174" y="203"/>
-                  <a:pt x="0" y="203"/>
+                  <a:pt x="174" y="204"/>
+                  <a:pt x="0" y="204"/>
                   <a:pt x="0" y="87"/>
                 </a:cubicBezTo>
                 <a:cubicBezTo>
@@ -9324,7 +9324,7 @@
         </p:nvSpPr>
         <p:spPr>
           <a:xfrm>
-            <a:off x="4155480" y="1225440"/>
+            <a:off x="4155480" y="1173600"/>
             <a:ext cx="62640" cy="62640"/>
           </a:xfrm>
           <a:custGeom>
@@ -9335,17 +9335,17 @@
             <a:pathLst>
               <a:path w="174" h="174">
                 <a:moveTo>
-                  <a:pt x="0" y="86"/>
+                  <a:pt x="0" y="87"/>
                 </a:moveTo>
                 <a:cubicBezTo>
                   <a:pt x="0" y="-29"/>
                   <a:pt x="174" y="-29"/>
-                  <a:pt x="174" y="86"/>
+                  <a:pt x="174" y="87"/>
                 </a:cubicBezTo>
                 <a:cubicBezTo>
                   <a:pt x="174" y="203"/>
                   <a:pt x="0" y="203"/>
-                  <a:pt x="0" y="86"/>
+                  <a:pt x="0" y="87"/>
                 </a:cubicBezTo>
                 <a:close/>
               </a:path>
@@ -9382,7 +9382,7 @@
         </p:nvSpPr>
         <p:spPr>
           <a:xfrm>
-            <a:off x="4155480" y="1225440"/>
+            <a:off x="4155480" y="1173600"/>
             <a:ext cx="62640" cy="62640"/>
           </a:xfrm>
           <a:custGeom>
@@ -9393,17 +9393,17 @@
             <a:pathLst>
               <a:path fill="none" w="174" h="174">
                 <a:moveTo>
-                  <a:pt x="174" y="86"/>
+                  <a:pt x="174" y="87"/>
                 </a:moveTo>
                 <a:cubicBezTo>
                   <a:pt x="174" y="203"/>
                   <a:pt x="0" y="203"/>
-                  <a:pt x="0" y="86"/>
+                  <a:pt x="0" y="87"/>
                 </a:cubicBezTo>
                 <a:cubicBezTo>
                   <a:pt x="0" y="-29"/>
                   <a:pt x="174" y="-29"/>
-                  <a:pt x="174" y="86"/>
+                  <a:pt x="174" y="87"/>
                 </a:cubicBezTo>
               </a:path>
             </a:pathLst>
@@ -9439,8 +9439,8 @@
         </p:nvSpPr>
         <p:spPr>
           <a:xfrm>
-            <a:off x="2859120" y="1203840"/>
-            <a:ext cx="62640" cy="62280"/>
+            <a:off x="2859120" y="1160640"/>
+            <a:ext cx="62640" cy="62640"/>
           </a:xfrm>
           <a:custGeom>
             <a:avLst/>
@@ -9448,7 +9448,7 @@
             <a:ahLst/>
             <a:rect l="0" t="0" r="r" b="b"/>
             <a:pathLst>
-              <a:path w="174" h="173">
+              <a:path w="174" h="174">
                 <a:moveTo>
                   <a:pt x="0" y="87"/>
                 </a:moveTo>
@@ -9458,8 +9458,8 @@
                   <a:pt x="174" y="87"/>
                 </a:cubicBezTo>
                 <a:cubicBezTo>
-                  <a:pt x="174" y="202"/>
-                  <a:pt x="0" y="202"/>
+                  <a:pt x="174" y="203"/>
+                  <a:pt x="0" y="203"/>
                   <a:pt x="0" y="87"/>
                 </a:cubicBezTo>
                 <a:close/>
@@ -9497,8 +9497,8 @@
         </p:nvSpPr>
         <p:spPr>
           <a:xfrm>
-            <a:off x="2859120" y="1203840"/>
-            <a:ext cx="62640" cy="62280"/>
+            <a:off x="2859120" y="1160640"/>
+            <a:ext cx="62640" cy="62640"/>
           </a:xfrm>
           <a:custGeom>
             <a:avLst/>
@@ -9506,13 +9506,13 @@
             <a:ahLst/>
             <a:rect l="0" t="0" r="r" b="b"/>
             <a:pathLst>
-              <a:path fill="none" w="174" h="173">
+              <a:path fill="none" w="174" h="174">
                 <a:moveTo>
                   <a:pt x="174" y="87"/>
                 </a:moveTo>
                 <a:cubicBezTo>
-                  <a:pt x="174" y="202"/>
-                  <a:pt x="0" y="202"/>
+                  <a:pt x="174" y="203"/>
+                  <a:pt x="0" y="203"/>
                   <a:pt x="0" y="87"/>
                 </a:cubicBezTo>
                 <a:cubicBezTo>
@@ -9554,8 +9554,8 @@
         </p:nvSpPr>
         <p:spPr>
           <a:xfrm>
-            <a:off x="3051720" y="1204920"/>
-            <a:ext cx="62640" cy="63000"/>
+            <a:off x="3051720" y="1137240"/>
+            <a:ext cx="62640" cy="62640"/>
           </a:xfrm>
           <a:custGeom>
             <a:avLst/>
@@ -9563,7 +9563,7 @@
             <a:ahLst/>
             <a:rect l="0" t="0" r="r" b="b"/>
             <a:pathLst>
-              <a:path w="174" h="175">
+              <a:path w="174" h="174">
                 <a:moveTo>
                   <a:pt x="0" y="87"/>
                 </a:moveTo>
@@ -9573,8 +9573,8 @@
                   <a:pt x="174" y="87"/>
                 </a:cubicBezTo>
                 <a:cubicBezTo>
-                  <a:pt x="174" y="204"/>
-                  <a:pt x="0" y="204"/>
+                  <a:pt x="174" y="203"/>
+                  <a:pt x="0" y="203"/>
                   <a:pt x="0" y="87"/>
                 </a:cubicBezTo>
                 <a:close/>
@@ -9612,8 +9612,8 @@
         </p:nvSpPr>
         <p:spPr>
           <a:xfrm>
-            <a:off x="3244680" y="1779120"/>
-            <a:ext cx="62640" cy="63000"/>
+            <a:off x="3244680" y="1689480"/>
+            <a:ext cx="62640" cy="62640"/>
           </a:xfrm>
           <a:custGeom>
             <a:avLst/>
@@ -9621,19 +9621,19 @@
             <a:ahLst/>
             <a:rect l="0" t="0" r="r" b="b"/>
             <a:pathLst>
-              <a:path w="174" h="175">
+              <a:path w="174" h="174">
                 <a:moveTo>
-                  <a:pt x="0" y="88"/>
+                  <a:pt x="0" y="87"/>
                 </a:moveTo>
                 <a:cubicBezTo>
                   <a:pt x="0" y="-29"/>
                   <a:pt x="174" y="-29"/>
-                  <a:pt x="174" y="88"/>
-                </a:cubicBezTo>
-                <a:cubicBezTo>
-                  <a:pt x="174" y="204"/>
-                  <a:pt x="0" y="204"/>
-                  <a:pt x="0" y="88"/>
+                  <a:pt x="174" y="87"/>
+                </a:cubicBezTo>
+                <a:cubicBezTo>
+                  <a:pt x="174" y="203"/>
+                  <a:pt x="0" y="203"/>
+                  <a:pt x="0" y="87"/>
                 </a:cubicBezTo>
                 <a:close/>
               </a:path>
@@ -9670,8 +9670,8 @@
         </p:nvSpPr>
         <p:spPr>
           <a:xfrm>
-            <a:off x="3437280" y="2020320"/>
-            <a:ext cx="62640" cy="63000"/>
+            <a:off x="3437280" y="1919160"/>
+            <a:ext cx="62640" cy="62640"/>
           </a:xfrm>
           <a:custGeom>
             <a:avLst/>
@@ -9679,7 +9679,7 @@
             <a:ahLst/>
             <a:rect l="0" t="0" r="r" b="b"/>
             <a:pathLst>
-              <a:path w="174" h="175">
+              <a:path w="174" h="174">
                 <a:moveTo>
                   <a:pt x="0" y="87"/>
                 </a:moveTo>
@@ -9689,8 +9689,8 @@
                   <a:pt x="174" y="87"/>
                 </a:cubicBezTo>
                 <a:cubicBezTo>
-                  <a:pt x="174" y="204"/>
-                  <a:pt x="0" y="204"/>
+                  <a:pt x="174" y="203"/>
+                  <a:pt x="0" y="203"/>
                   <a:pt x="0" y="87"/>
                 </a:cubicBezTo>
                 <a:close/>
@@ -9728,8 +9728,8 @@
         </p:nvSpPr>
         <p:spPr>
           <a:xfrm>
-            <a:off x="3437280" y="2020320"/>
-            <a:ext cx="62640" cy="63000"/>
+            <a:off x="3437280" y="1919160"/>
+            <a:ext cx="62640" cy="62640"/>
           </a:xfrm>
           <a:custGeom>
             <a:avLst/>
@@ -9737,13 +9737,13 @@
             <a:ahLst/>
             <a:rect l="0" t="0" r="r" b="b"/>
             <a:pathLst>
-              <a:path fill="none" w="174" h="175">
+              <a:path fill="none" w="174" h="174">
                 <a:moveTo>
                   <a:pt x="174" y="87"/>
                 </a:moveTo>
                 <a:cubicBezTo>
-                  <a:pt x="174" y="204"/>
-                  <a:pt x="0" y="204"/>
+                  <a:pt x="174" y="203"/>
+                  <a:pt x="0" y="203"/>
                   <a:pt x="0" y="87"/>
                 </a:cubicBezTo>
                 <a:cubicBezTo>
@@ -9785,7 +9785,352 @@
         </p:nvSpPr>
         <p:spPr>
           <a:xfrm>
-            <a:off x="3630240" y="2577600"/>
+            <a:off x="3630240" y="2441520"/>
+            <a:ext cx="62640" cy="62640"/>
+          </a:xfrm>
+          <a:custGeom>
+            <a:avLst/>
+            <a:gdLst/>
+            <a:ahLst/>
+            <a:rect l="0" t="0" r="r" b="b"/>
+            <a:pathLst>
+              <a:path w="174" h="174">
+                <a:moveTo>
+                  <a:pt x="0" y="88"/>
+                </a:moveTo>
+                <a:cubicBezTo>
+                  <a:pt x="0" y="-29"/>
+                  <a:pt x="174" y="-29"/>
+                  <a:pt x="174" y="88"/>
+                </a:cubicBezTo>
+                <a:cubicBezTo>
+                  <a:pt x="174" y="203"/>
+                  <a:pt x="0" y="203"/>
+                  <a:pt x="0" y="88"/>
+                </a:cubicBezTo>
+                <a:close/>
+              </a:path>
+            </a:pathLst>
+          </a:custGeom>
+          <a:solidFill>
+            <a:srgbClr val="FFFFFF"/>
+          </a:solidFill>
+          <a:ln w="0">
+            <a:noFill/>
+          </a:ln>
+        </p:spPr>
+        <p:txBody>
+          <a:bodyPr lIns="0" tIns="0" rIns="0" bIns="0" anchor="t">
+            <a:noAutofit/>
+          </a:bodyPr>
+          <a:p>
+            <a:endParaRPr lang="en-US" sz="2400" b="0" u="none" strike="noStrike">
+              <a:solidFill>
+                <a:srgbClr val="000000"/>
+              </a:solidFill>
+              <a:effectLst/>
+              <a:uFillTx/>
+              <a:latin typeface="Times New Roman"/>
+            </a:endParaRPr>
+          </a:p>
+        </p:txBody>
+      </p:sp>
+      <p:sp>
+        <p:nvSpPr>
+          <p:cNvPr id="134" name=""/>
+          <p:cNvSpPr/>
+          <p:nvPr/>
+        </p:nvSpPr>
+        <p:spPr>
+          <a:xfrm>
+            <a:off x="3630240" y="2441520"/>
+            <a:ext cx="62640" cy="62640"/>
+          </a:xfrm>
+          <a:custGeom>
+            <a:avLst/>
+            <a:gdLst/>
+            <a:ahLst/>
+            <a:rect l="0" t="0" r="r" b="b"/>
+            <a:pathLst>
+              <a:path fill="none" w="174" h="174">
+                <a:moveTo>
+                  <a:pt x="174" y="88"/>
+                </a:moveTo>
+                <a:cubicBezTo>
+                  <a:pt x="174" y="203"/>
+                  <a:pt x="0" y="203"/>
+                  <a:pt x="0" y="88"/>
+                </a:cubicBezTo>
+                <a:cubicBezTo>
+                  <a:pt x="0" y="-29"/>
+                  <a:pt x="174" y="-29"/>
+                  <a:pt x="174" y="88"/>
+                </a:cubicBezTo>
+              </a:path>
+            </a:pathLst>
+          </a:custGeom>
+          <a:ln cap="rnd" w="10800">
+            <a:solidFill>
+              <a:srgbClr val="D55E00"/>
+            </a:solidFill>
+            <a:round/>
+          </a:ln>
+        </p:spPr>
+        <p:txBody>
+          <a:bodyPr lIns="5400" tIns="5400" rIns="5400" bIns="5400" anchor="t">
+            <a:noAutofit/>
+          </a:bodyPr>
+          <a:p>
+            <a:endParaRPr lang="en-US" sz="2400" b="0" u="none" strike="noStrike">
+              <a:solidFill>
+                <a:srgbClr val="000000"/>
+              </a:solidFill>
+              <a:effectLst/>
+              <a:uFillTx/>
+              <a:latin typeface="Times New Roman"/>
+            </a:endParaRPr>
+          </a:p>
+        </p:txBody>
+      </p:sp>
+      <p:sp>
+        <p:nvSpPr>
+          <p:cNvPr id="135" name=""/>
+          <p:cNvSpPr/>
+          <p:nvPr/>
+        </p:nvSpPr>
+        <p:spPr>
+          <a:xfrm>
+            <a:off x="3822840" y="1235880"/>
+            <a:ext cx="62640" cy="62640"/>
+          </a:xfrm>
+          <a:custGeom>
+            <a:avLst/>
+            <a:gdLst/>
+            <a:ahLst/>
+            <a:rect l="0" t="0" r="r" b="b"/>
+            <a:pathLst>
+              <a:path w="174" h="174">
+                <a:moveTo>
+                  <a:pt x="0" y="87"/>
+                </a:moveTo>
+                <a:cubicBezTo>
+                  <a:pt x="0" y="-29"/>
+                  <a:pt x="174" y="-29"/>
+                  <a:pt x="174" y="87"/>
+                </a:cubicBezTo>
+                <a:cubicBezTo>
+                  <a:pt x="174" y="203"/>
+                  <a:pt x="0" y="203"/>
+                  <a:pt x="0" y="87"/>
+                </a:cubicBezTo>
+                <a:close/>
+              </a:path>
+            </a:pathLst>
+          </a:custGeom>
+          <a:solidFill>
+            <a:srgbClr val="FFFFFF"/>
+          </a:solidFill>
+          <a:ln w="0">
+            <a:noFill/>
+          </a:ln>
+        </p:spPr>
+        <p:txBody>
+          <a:bodyPr lIns="0" tIns="0" rIns="0" bIns="0" anchor="t">
+            <a:noAutofit/>
+          </a:bodyPr>
+          <a:p>
+            <a:endParaRPr lang="en-US" sz="2400" b="0" u="none" strike="noStrike">
+              <a:solidFill>
+                <a:srgbClr val="000000"/>
+              </a:solidFill>
+              <a:effectLst/>
+              <a:uFillTx/>
+              <a:latin typeface="Times New Roman"/>
+            </a:endParaRPr>
+          </a:p>
+        </p:txBody>
+      </p:sp>
+      <p:sp>
+        <p:nvSpPr>
+          <p:cNvPr id="136" name=""/>
+          <p:cNvSpPr/>
+          <p:nvPr/>
+        </p:nvSpPr>
+        <p:spPr>
+          <a:xfrm>
+            <a:off x="3822840" y="1235880"/>
+            <a:ext cx="62640" cy="62640"/>
+          </a:xfrm>
+          <a:custGeom>
+            <a:avLst/>
+            <a:gdLst/>
+            <a:ahLst/>
+            <a:rect l="0" t="0" r="r" b="b"/>
+            <a:pathLst>
+              <a:path fill="none" w="174" h="174">
+                <a:moveTo>
+                  <a:pt x="174" y="87"/>
+                </a:moveTo>
+                <a:cubicBezTo>
+                  <a:pt x="174" y="203"/>
+                  <a:pt x="0" y="203"/>
+                  <a:pt x="0" y="87"/>
+                </a:cubicBezTo>
+                <a:cubicBezTo>
+                  <a:pt x="0" y="-29"/>
+                  <a:pt x="174" y="-29"/>
+                  <a:pt x="174" y="87"/>
+                </a:cubicBezTo>
+              </a:path>
+            </a:pathLst>
+          </a:custGeom>
+          <a:ln cap="rnd" w="10800">
+            <a:solidFill>
+              <a:srgbClr val="D55E00"/>
+            </a:solidFill>
+            <a:round/>
+          </a:ln>
+        </p:spPr>
+        <p:txBody>
+          <a:bodyPr lIns="5400" tIns="5400" rIns="5400" bIns="5400" anchor="t">
+            <a:noAutofit/>
+          </a:bodyPr>
+          <a:p>
+            <a:endParaRPr lang="en-US" sz="2400" b="0" u="none" strike="noStrike">
+              <a:solidFill>
+                <a:srgbClr val="000000"/>
+              </a:solidFill>
+              <a:effectLst/>
+              <a:uFillTx/>
+              <a:latin typeface="Times New Roman"/>
+            </a:endParaRPr>
+          </a:p>
+        </p:txBody>
+      </p:sp>
+      <p:sp>
+        <p:nvSpPr>
+          <p:cNvPr id="137" name=""/>
+          <p:cNvSpPr/>
+          <p:nvPr/>
+        </p:nvSpPr>
+        <p:spPr>
+          <a:xfrm>
+            <a:off x="4015800" y="1544040"/>
+            <a:ext cx="62640" cy="62640"/>
+          </a:xfrm>
+          <a:custGeom>
+            <a:avLst/>
+            <a:gdLst/>
+            <a:ahLst/>
+            <a:rect l="0" t="0" r="r" b="b"/>
+            <a:pathLst>
+              <a:path w="174" h="174">
+                <a:moveTo>
+                  <a:pt x="0" y="86"/>
+                </a:moveTo>
+                <a:cubicBezTo>
+                  <a:pt x="0" y="-29"/>
+                  <a:pt x="174" y="-29"/>
+                  <a:pt x="174" y="86"/>
+                </a:cubicBezTo>
+                <a:cubicBezTo>
+                  <a:pt x="174" y="203"/>
+                  <a:pt x="0" y="203"/>
+                  <a:pt x="0" y="86"/>
+                </a:cubicBezTo>
+                <a:close/>
+              </a:path>
+            </a:pathLst>
+          </a:custGeom>
+          <a:solidFill>
+            <a:srgbClr val="FFFFFF"/>
+          </a:solidFill>
+          <a:ln w="0">
+            <a:noFill/>
+          </a:ln>
+        </p:spPr>
+        <p:txBody>
+          <a:bodyPr lIns="0" tIns="0" rIns="0" bIns="0" anchor="t">
+            <a:noAutofit/>
+          </a:bodyPr>
+          <a:p>
+            <a:endParaRPr lang="en-US" sz="2400" b="0" u="none" strike="noStrike">
+              <a:solidFill>
+                <a:srgbClr val="000000"/>
+              </a:solidFill>
+              <a:effectLst/>
+              <a:uFillTx/>
+              <a:latin typeface="Times New Roman"/>
+            </a:endParaRPr>
+          </a:p>
+        </p:txBody>
+      </p:sp>
+      <p:sp>
+        <p:nvSpPr>
+          <p:cNvPr id="138" name=""/>
+          <p:cNvSpPr/>
+          <p:nvPr/>
+        </p:nvSpPr>
+        <p:spPr>
+          <a:xfrm>
+            <a:off x="4015800" y="1544040"/>
+            <a:ext cx="62640" cy="62640"/>
+          </a:xfrm>
+          <a:custGeom>
+            <a:avLst/>
+            <a:gdLst/>
+            <a:ahLst/>
+            <a:rect l="0" t="0" r="r" b="b"/>
+            <a:pathLst>
+              <a:path fill="none" w="174" h="174">
+                <a:moveTo>
+                  <a:pt x="174" y="86"/>
+                </a:moveTo>
+                <a:cubicBezTo>
+                  <a:pt x="174" y="203"/>
+                  <a:pt x="0" y="203"/>
+                  <a:pt x="0" y="86"/>
+                </a:cubicBezTo>
+                <a:cubicBezTo>
+                  <a:pt x="0" y="-29"/>
+                  <a:pt x="174" y="-29"/>
+                  <a:pt x="174" y="86"/>
+                </a:cubicBezTo>
+              </a:path>
+            </a:pathLst>
+          </a:custGeom>
+          <a:ln cap="rnd" w="10800">
+            <a:solidFill>
+              <a:srgbClr val="D55E00"/>
+            </a:solidFill>
+            <a:round/>
+          </a:ln>
+        </p:spPr>
+        <p:txBody>
+          <a:bodyPr lIns="5400" tIns="5400" rIns="5400" bIns="5400" anchor="t">
+            <a:noAutofit/>
+          </a:bodyPr>
+          <a:p>
+            <a:endParaRPr lang="en-US" sz="2400" b="0" u="none" strike="noStrike">
+              <a:solidFill>
+                <a:srgbClr val="000000"/>
+              </a:solidFill>
+              <a:effectLst/>
+              <a:uFillTx/>
+              <a:latin typeface="Times New Roman"/>
+            </a:endParaRPr>
+          </a:p>
+        </p:txBody>
+      </p:sp>
+      <p:sp>
+        <p:nvSpPr>
+          <p:cNvPr id="139" name=""/>
+          <p:cNvSpPr/>
+          <p:nvPr/>
+        </p:nvSpPr>
+        <p:spPr>
+          <a:xfrm>
+            <a:off x="4208400" y="342720"/>
             <a:ext cx="62640" cy="63000"/>
           </a:xfrm>
           <a:custGeom>
@@ -9837,295 +10182,7 @@
       </p:sp>
       <p:sp>
         <p:nvSpPr>
-          <p:cNvPr id="134" name=""/>
-          <p:cNvSpPr/>
-          <p:nvPr/>
-        </p:nvSpPr>
-        <p:spPr>
-          <a:xfrm>
-            <a:off x="3822840" y="1278720"/>
-            <a:ext cx="62640" cy="63000"/>
-          </a:xfrm>
-          <a:custGeom>
-            <a:avLst/>
-            <a:gdLst/>
-            <a:ahLst/>
-            <a:rect l="0" t="0" r="r" b="b"/>
-            <a:pathLst>
-              <a:path w="174" h="175">
-                <a:moveTo>
-                  <a:pt x="0" y="87"/>
-                </a:moveTo>
-                <a:cubicBezTo>
-                  <a:pt x="0" y="-29"/>
-                  <a:pt x="174" y="-29"/>
-                  <a:pt x="174" y="87"/>
-                </a:cubicBezTo>
-                <a:cubicBezTo>
-                  <a:pt x="174" y="204"/>
-                  <a:pt x="0" y="204"/>
-                  <a:pt x="0" y="87"/>
-                </a:cubicBezTo>
-                <a:close/>
-              </a:path>
-            </a:pathLst>
-          </a:custGeom>
-          <a:solidFill>
-            <a:srgbClr val="FFFFFF"/>
-          </a:solidFill>
-          <a:ln w="0">
-            <a:noFill/>
-          </a:ln>
-        </p:spPr>
-        <p:txBody>
-          <a:bodyPr lIns="0" tIns="0" rIns="0" bIns="0" anchor="t">
-            <a:noAutofit/>
-          </a:bodyPr>
-          <a:p>
-            <a:endParaRPr lang="en-US" sz="2400" b="0" u="none" strike="noStrike">
-              <a:solidFill>
-                <a:srgbClr val="000000"/>
-              </a:solidFill>
-              <a:effectLst/>
-              <a:uFillTx/>
-              <a:latin typeface="Times New Roman"/>
-            </a:endParaRPr>
-          </a:p>
-        </p:txBody>
-      </p:sp>
-      <p:sp>
-        <p:nvSpPr>
-          <p:cNvPr id="135" name=""/>
-          <p:cNvSpPr/>
-          <p:nvPr/>
-        </p:nvSpPr>
-        <p:spPr>
-          <a:xfrm>
-            <a:off x="3822840" y="1278720"/>
-            <a:ext cx="62640" cy="63000"/>
-          </a:xfrm>
-          <a:custGeom>
-            <a:avLst/>
-            <a:gdLst/>
-            <a:ahLst/>
-            <a:rect l="0" t="0" r="r" b="b"/>
-            <a:pathLst>
-              <a:path fill="none" w="174" h="175">
-                <a:moveTo>
-                  <a:pt x="174" y="87"/>
-                </a:moveTo>
-                <a:cubicBezTo>
-                  <a:pt x="174" y="204"/>
-                  <a:pt x="0" y="204"/>
-                  <a:pt x="0" y="87"/>
-                </a:cubicBezTo>
-                <a:cubicBezTo>
-                  <a:pt x="0" y="-29"/>
-                  <a:pt x="174" y="-29"/>
-                  <a:pt x="174" y="87"/>
-                </a:cubicBezTo>
-              </a:path>
-            </a:pathLst>
-          </a:custGeom>
-          <a:ln cap="rnd" w="10800">
-            <a:solidFill>
-              <a:srgbClr val="D55E00"/>
-            </a:solidFill>
-            <a:round/>
-          </a:ln>
-        </p:spPr>
-        <p:txBody>
-          <a:bodyPr lIns="5400" tIns="5400" rIns="5400" bIns="5400" anchor="t">
-            <a:noAutofit/>
-          </a:bodyPr>
-          <a:p>
-            <a:endParaRPr lang="en-US" sz="2400" b="0" u="none" strike="noStrike">
-              <a:solidFill>
-                <a:srgbClr val="000000"/>
-              </a:solidFill>
-              <a:effectLst/>
-              <a:uFillTx/>
-              <a:latin typeface="Times New Roman"/>
-            </a:endParaRPr>
-          </a:p>
-        </p:txBody>
-      </p:sp>
-      <p:sp>
-        <p:nvSpPr>
-          <p:cNvPr id="136" name=""/>
-          <p:cNvSpPr/>
-          <p:nvPr/>
-        </p:nvSpPr>
-        <p:spPr>
-          <a:xfrm>
-            <a:off x="4015800" y="1625040"/>
-            <a:ext cx="62640" cy="62640"/>
-          </a:xfrm>
-          <a:custGeom>
-            <a:avLst/>
-            <a:gdLst/>
-            <a:ahLst/>
-            <a:rect l="0" t="0" r="r" b="b"/>
-            <a:pathLst>
-              <a:path w="174" h="174">
-                <a:moveTo>
-                  <a:pt x="0" y="88"/>
-                </a:moveTo>
-                <a:cubicBezTo>
-                  <a:pt x="0" y="-29"/>
-                  <a:pt x="174" y="-29"/>
-                  <a:pt x="174" y="88"/>
-                </a:cubicBezTo>
-                <a:cubicBezTo>
-                  <a:pt x="174" y="203"/>
-                  <a:pt x="0" y="203"/>
-                  <a:pt x="0" y="88"/>
-                </a:cubicBezTo>
-                <a:close/>
-              </a:path>
-            </a:pathLst>
-          </a:custGeom>
-          <a:solidFill>
-            <a:srgbClr val="FFFFFF"/>
-          </a:solidFill>
-          <a:ln w="0">
-            <a:noFill/>
-          </a:ln>
-        </p:spPr>
-        <p:txBody>
-          <a:bodyPr lIns="0" tIns="0" rIns="0" bIns="0" anchor="t">
-            <a:noAutofit/>
-          </a:bodyPr>
-          <a:p>
-            <a:endParaRPr lang="en-US" sz="2400" b="0" u="none" strike="noStrike">
-              <a:solidFill>
-                <a:srgbClr val="000000"/>
-              </a:solidFill>
-              <a:effectLst/>
-              <a:uFillTx/>
-              <a:latin typeface="Times New Roman"/>
-            </a:endParaRPr>
-          </a:p>
-        </p:txBody>
-      </p:sp>
-      <p:sp>
-        <p:nvSpPr>
-          <p:cNvPr id="137" name=""/>
-          <p:cNvSpPr/>
-          <p:nvPr/>
-        </p:nvSpPr>
-        <p:spPr>
-          <a:xfrm>
-            <a:off x="4015800" y="1625040"/>
-            <a:ext cx="62640" cy="62640"/>
-          </a:xfrm>
-          <a:custGeom>
-            <a:avLst/>
-            <a:gdLst/>
-            <a:ahLst/>
-            <a:rect l="0" t="0" r="r" b="b"/>
-            <a:pathLst>
-              <a:path fill="none" w="174" h="174">
-                <a:moveTo>
-                  <a:pt x="174" y="88"/>
-                </a:moveTo>
-                <a:cubicBezTo>
-                  <a:pt x="174" y="203"/>
-                  <a:pt x="0" y="203"/>
-                  <a:pt x="0" y="88"/>
-                </a:cubicBezTo>
-                <a:cubicBezTo>
-                  <a:pt x="0" y="-29"/>
-                  <a:pt x="174" y="-29"/>
-                  <a:pt x="174" y="88"/>
-                </a:cubicBezTo>
-              </a:path>
-            </a:pathLst>
-          </a:custGeom>
-          <a:ln cap="rnd" w="10800">
-            <a:solidFill>
-              <a:srgbClr val="D55E00"/>
-            </a:solidFill>
-            <a:round/>
-          </a:ln>
-        </p:spPr>
-        <p:txBody>
-          <a:bodyPr lIns="5400" tIns="5400" rIns="5400" bIns="5400" anchor="t">
-            <a:noAutofit/>
-          </a:bodyPr>
-          <a:p>
-            <a:endParaRPr lang="en-US" sz="2400" b="0" u="none" strike="noStrike">
-              <a:solidFill>
-                <a:srgbClr val="000000"/>
-              </a:solidFill>
-              <a:effectLst/>
-              <a:uFillTx/>
-              <a:latin typeface="Times New Roman"/>
-            </a:endParaRPr>
-          </a:p>
-        </p:txBody>
-      </p:sp>
-      <p:sp>
-        <p:nvSpPr>
-          <p:cNvPr id="138" name=""/>
-          <p:cNvSpPr/>
-          <p:nvPr/>
-        </p:nvSpPr>
-        <p:spPr>
-          <a:xfrm>
-            <a:off x="4208400" y="342720"/>
-            <a:ext cx="62640" cy="63000"/>
-          </a:xfrm>
-          <a:custGeom>
-            <a:avLst/>
-            <a:gdLst/>
-            <a:ahLst/>
-            <a:rect l="0" t="0" r="r" b="b"/>
-            <a:pathLst>
-              <a:path w="174" h="175">
-                <a:moveTo>
-                  <a:pt x="0" y="88"/>
-                </a:moveTo>
-                <a:cubicBezTo>
-                  <a:pt x="0" y="-29"/>
-                  <a:pt x="174" y="-29"/>
-                  <a:pt x="174" y="88"/>
-                </a:cubicBezTo>
-                <a:cubicBezTo>
-                  <a:pt x="174" y="204"/>
-                  <a:pt x="0" y="204"/>
-                  <a:pt x="0" y="88"/>
-                </a:cubicBezTo>
-                <a:close/>
-              </a:path>
-            </a:pathLst>
-          </a:custGeom>
-          <a:solidFill>
-            <a:srgbClr val="D55E00"/>
-          </a:solidFill>
-          <a:ln w="0">
-            <a:noFill/>
-          </a:ln>
-        </p:spPr>
-        <p:txBody>
-          <a:bodyPr lIns="0" tIns="0" rIns="0" bIns="0" anchor="t">
-            <a:noAutofit/>
-          </a:bodyPr>
-          <a:p>
-            <a:endParaRPr lang="en-US" sz="2400" b="0" u="none" strike="noStrike">
-              <a:solidFill>
-                <a:srgbClr val="FFFFFF"/>
-              </a:solidFill>
-              <a:effectLst/>
-              <a:uFillTx/>
-              <a:latin typeface="Times New Roman"/>
-            </a:endParaRPr>
-          </a:p>
-        </p:txBody>
-      </p:sp>
-      <p:sp>
-        <p:nvSpPr>
-          <p:cNvPr id="139" name=""/>
+          <p:cNvPr id="140" name=""/>
           <p:cNvSpPr/>
           <p:nvPr/>
         </p:nvSpPr>
@@ -10168,7 +10225,7 @@
       </p:sp>
       <p:sp>
         <p:nvSpPr>
-          <p:cNvPr id="140" name=""/>
+          <p:cNvPr id="141" name=""/>
           <p:cNvSpPr txBox="1"/>
           <p:nvPr/>
         </p:nvSpPr>
@@ -10216,13 +10273,13 @@
       </p:sp>
       <p:sp>
         <p:nvSpPr>
-          <p:cNvPr id="141" name=""/>
+          <p:cNvPr id="142" name=""/>
           <p:cNvSpPr txBox="1"/>
           <p:nvPr/>
         </p:nvSpPr>
         <p:spPr>
           <a:xfrm>
-            <a:off x="2525040" y="2165760"/>
+            <a:off x="2525040" y="2043720"/>
             <a:ext cx="172800" cy="88920"/>
           </a:xfrm>
           <a:prstGeom prst="rect">
@@ -10264,13 +10321,13 @@
       </p:sp>
       <p:sp>
         <p:nvSpPr>
-          <p:cNvPr id="142" name=""/>
+          <p:cNvPr id="143" name=""/>
           <p:cNvSpPr txBox="1"/>
           <p:nvPr/>
         </p:nvSpPr>
         <p:spPr>
           <a:xfrm>
-            <a:off x="2651760" y="1538280"/>
+            <a:off x="2651760" y="1462680"/>
             <a:ext cx="88560" cy="88920"/>
           </a:xfrm>
           <a:prstGeom prst="rect">
@@ -10312,13 +10369,13 @@
       </p:sp>
       <p:sp>
         <p:nvSpPr>
-          <p:cNvPr id="143" name=""/>
-          <p:cNvSpPr/>
-          <p:nvPr/>
-        </p:nvSpPr>
-        <p:spPr>
-          <a:xfrm>
-            <a:off x="2722680" y="2203560"/>
+          <p:cNvPr id="144" name=""/>
+          <p:cNvSpPr/>
+          <p:nvPr/>
+        </p:nvSpPr>
+        <p:spPr>
+          <a:xfrm>
+            <a:off x="2722680" y="2081520"/>
             <a:ext cx="25560" cy="0"/>
           </a:xfrm>
           <a:prstGeom prst="line">
@@ -10355,13 +10412,13 @@
       </p:sp>
       <p:sp>
         <p:nvSpPr>
-          <p:cNvPr id="144" name=""/>
-          <p:cNvSpPr/>
-          <p:nvPr/>
-        </p:nvSpPr>
-        <p:spPr>
-          <a:xfrm>
-            <a:off x="2722680" y="1576080"/>
+          <p:cNvPr id="145" name=""/>
+          <p:cNvSpPr/>
+          <p:nvPr/>
+        </p:nvSpPr>
+        <p:spPr>
+          <a:xfrm>
+            <a:off x="2722680" y="1500480"/>
             <a:ext cx="25560" cy="0"/>
           </a:xfrm>
           <a:prstGeom prst="line">
@@ -10398,13 +10455,13 @@
       </p:sp>
       <p:sp>
         <p:nvSpPr>
-          <p:cNvPr id="145" name=""/>
-          <p:cNvSpPr/>
-          <p:nvPr/>
-        </p:nvSpPr>
-        <p:spPr>
-          <a:xfrm>
-            <a:off x="2722680" y="691560"/>
+          <p:cNvPr id="146" name=""/>
+          <p:cNvSpPr/>
+          <p:nvPr/>
+        </p:nvSpPr>
+        <p:spPr>
+          <a:xfrm>
+            <a:off x="2722680" y="681840"/>
             <a:ext cx="25560" cy="0"/>
           </a:xfrm>
           <a:prstGeom prst="line">
@@ -10441,7 +10498,7 @@
       </p:sp>
       <p:sp>
         <p:nvSpPr>
-          <p:cNvPr id="146" name=""/>
+          <p:cNvPr id="147" name=""/>
           <p:cNvSpPr/>
           <p:nvPr/>
         </p:nvSpPr>
@@ -10484,7 +10541,7 @@
       </p:sp>
       <p:sp>
         <p:nvSpPr>
-          <p:cNvPr id="147" name=""/>
+          <p:cNvPr id="148" name=""/>
           <p:cNvSpPr/>
           <p:nvPr/>
         </p:nvSpPr>
@@ -10527,7 +10584,7 @@
       </p:sp>
       <p:sp>
         <p:nvSpPr>
-          <p:cNvPr id="148" name=""/>
+          <p:cNvPr id="149" name=""/>
           <p:cNvSpPr/>
           <p:nvPr/>
         </p:nvSpPr>
@@ -10570,7 +10627,7 @@
       </p:sp>
       <p:sp>
         <p:nvSpPr>
-          <p:cNvPr id="149" name=""/>
+          <p:cNvPr id="150" name=""/>
           <p:cNvSpPr/>
           <p:nvPr/>
         </p:nvSpPr>
@@ -10613,7 +10670,7 @@
       </p:sp>
       <p:sp>
         <p:nvSpPr>
-          <p:cNvPr id="150" name=""/>
+          <p:cNvPr id="151" name=""/>
           <p:cNvSpPr/>
           <p:nvPr/>
         </p:nvSpPr>
@@ -10656,7 +10713,7 @@
       </p:sp>
       <p:sp>
         <p:nvSpPr>
-          <p:cNvPr id="151" name=""/>
+          <p:cNvPr id="152" name=""/>
           <p:cNvSpPr/>
           <p:nvPr/>
         </p:nvSpPr>
@@ -10699,7 +10756,7 @@
       </p:sp>
       <p:sp>
         <p:nvSpPr>
-          <p:cNvPr id="152" name=""/>
+          <p:cNvPr id="153" name=""/>
           <p:cNvSpPr/>
           <p:nvPr/>
         </p:nvSpPr>
@@ -10742,7 +10799,7 @@
       </p:sp>
       <p:sp>
         <p:nvSpPr>
-          <p:cNvPr id="153" name=""/>
+          <p:cNvPr id="154" name=""/>
           <p:cNvSpPr/>
           <p:nvPr/>
         </p:nvSpPr>
@@ -10785,7 +10842,7 @@
       </p:sp>
       <p:sp>
         <p:nvSpPr>
-          <p:cNvPr id="154" name=""/>
+          <p:cNvPr id="155" name=""/>
           <p:cNvSpPr/>
           <p:nvPr/>
         </p:nvSpPr>
@@ -10828,13 +10885,13 @@
       </p:sp>
       <p:sp>
         <p:nvSpPr>
-          <p:cNvPr id="155" name=""/>
+          <p:cNvPr id="156" name=""/>
           <p:cNvSpPr txBox="1"/>
           <p:nvPr/>
         </p:nvSpPr>
         <p:spPr>
           <a:xfrm>
-            <a:off x="2575800" y="653760"/>
+            <a:off x="2575800" y="644040"/>
             <a:ext cx="123480" cy="88920"/>
           </a:xfrm>
           <a:prstGeom prst="rect">
@@ -10876,7 +10933,7 @@
       </p:sp>
       <p:sp>
         <p:nvSpPr>
-          <p:cNvPr id="156" name=""/>
+          <p:cNvPr id="157" name=""/>
           <p:cNvSpPr txBox="1"/>
           <p:nvPr/>
         </p:nvSpPr>
@@ -10924,7 +10981,7 @@
       </p:sp>
       <p:sp>
         <p:nvSpPr>
-          <p:cNvPr id="157" name=""/>
+          <p:cNvPr id="158" name=""/>
           <p:cNvSpPr txBox="1"/>
           <p:nvPr/>
         </p:nvSpPr>
@@ -10972,7 +11029,7 @@
       </p:sp>
       <p:sp>
         <p:nvSpPr>
-          <p:cNvPr id="158" name=""/>
+          <p:cNvPr id="159" name=""/>
           <p:cNvSpPr txBox="1"/>
           <p:nvPr/>
         </p:nvSpPr>
@@ -11020,7 +11077,7 @@
       </p:sp>
       <p:sp>
         <p:nvSpPr>
-          <p:cNvPr id="159" name=""/>
+          <p:cNvPr id="160" name=""/>
           <p:cNvSpPr txBox="1"/>
           <p:nvPr/>
         </p:nvSpPr>
@@ -11068,7 +11125,7 @@
       </p:sp>
       <p:sp>
         <p:nvSpPr>
-          <p:cNvPr id="160" name=""/>
+          <p:cNvPr id="161" name=""/>
           <p:cNvSpPr txBox="1"/>
           <p:nvPr/>
         </p:nvSpPr>
@@ -11116,7 +11173,7 @@
       </p:sp>
       <p:sp>
         <p:nvSpPr>
-          <p:cNvPr id="161" name=""/>
+          <p:cNvPr id="162" name=""/>
           <p:cNvSpPr txBox="1"/>
           <p:nvPr/>
         </p:nvSpPr>
@@ -11164,7 +11221,7 @@
       </p:sp>
       <p:sp>
         <p:nvSpPr>
-          <p:cNvPr id="162" name=""/>
+          <p:cNvPr id="163" name=""/>
           <p:cNvSpPr txBox="1"/>
           <p:nvPr/>
         </p:nvSpPr>
@@ -11212,7 +11269,7 @@
       </p:sp>
       <p:sp>
         <p:nvSpPr>
-          <p:cNvPr id="163" name=""/>
+          <p:cNvPr id="164" name=""/>
           <p:cNvSpPr txBox="1"/>
           <p:nvPr/>
         </p:nvSpPr>
@@ -11260,7 +11317,7 @@
       </p:sp>
       <p:sp>
         <p:nvSpPr>
-          <p:cNvPr id="164" name=""/>
+          <p:cNvPr id="165" name=""/>
           <p:cNvSpPr/>
           <p:nvPr/>
         </p:nvSpPr>
@@ -11320,7 +11377,7 @@
       </p:sp>
       <p:sp>
         <p:nvSpPr>
-          <p:cNvPr id="165" name=""/>
+          <p:cNvPr id="166" name=""/>
           <p:cNvSpPr/>
           <p:nvPr/>
         </p:nvSpPr>
@@ -11380,7 +11437,7 @@
       </p:sp>
       <p:sp>
         <p:nvSpPr>
-          <p:cNvPr id="166" name=""/>
+          <p:cNvPr id="167" name=""/>
           <p:cNvSpPr/>
           <p:nvPr/>
         </p:nvSpPr>
@@ -11425,7 +11482,7 @@
       </p:sp>
       <p:sp>
         <p:nvSpPr>
-          <p:cNvPr id="167" name=""/>
+          <p:cNvPr id="168" name=""/>
           <p:cNvSpPr/>
           <p:nvPr/>
         </p:nvSpPr>
@@ -11483,7 +11540,7 @@
       </p:sp>
       <p:sp>
         <p:nvSpPr>
-          <p:cNvPr id="168" name=""/>
+          <p:cNvPr id="169" name=""/>
           <p:cNvSpPr/>
           <p:nvPr/>
         </p:nvSpPr>
@@ -11540,7 +11597,7 @@
       </p:sp>
       <p:sp>
         <p:nvSpPr>
-          <p:cNvPr id="169" name=""/>
+          <p:cNvPr id="170" name=""/>
           <p:cNvSpPr/>
           <p:nvPr/>
         </p:nvSpPr>
@@ -11600,7 +11657,7 @@
       </p:sp>
       <p:sp>
         <p:nvSpPr>
-          <p:cNvPr id="170" name=""/>
+          <p:cNvPr id="171" name=""/>
           <p:cNvSpPr/>
           <p:nvPr/>
         </p:nvSpPr>
@@ -11645,7 +11702,7 @@
       </p:sp>
       <p:sp>
         <p:nvSpPr>
-          <p:cNvPr id="171" name=""/>
+          <p:cNvPr id="172" name=""/>
           <p:cNvSpPr/>
           <p:nvPr/>
         </p:nvSpPr>
@@ -11703,7 +11760,7 @@
       </p:sp>
       <p:sp>
         <p:nvSpPr>
-          <p:cNvPr id="172" name=""/>
+          <p:cNvPr id="173" name=""/>
           <p:cNvSpPr/>
           <p:nvPr/>
         </p:nvSpPr>
@@ -11760,7 +11817,7 @@
       </p:sp>
       <p:sp>
         <p:nvSpPr>
-          <p:cNvPr id="173" name=""/>
+          <p:cNvPr id="174" name=""/>
           <p:cNvSpPr txBox="1"/>
           <p:nvPr/>
         </p:nvSpPr>
@@ -11808,7 +11865,7 @@
       </p:sp>
       <p:sp>
         <p:nvSpPr>
-          <p:cNvPr id="174" name=""/>
+          <p:cNvPr id="175" name=""/>
           <p:cNvSpPr txBox="1"/>
           <p:nvPr/>
         </p:nvSpPr>
@@ -11856,7 +11913,7 @@
       </p:sp>
       <p:sp>
         <p:nvSpPr>
-          <p:cNvPr id="175" name=""/>
+          <p:cNvPr id="176" name=""/>
           <p:cNvSpPr/>
           <p:nvPr/>
         </p:nvSpPr>
@@ -11916,7 +11973,7 @@
       </p:sp>
       <p:sp>
         <p:nvSpPr>
-          <p:cNvPr id="176" name=""/>
+          <p:cNvPr id="177" name=""/>
           <p:cNvSpPr/>
           <p:nvPr/>
         </p:nvSpPr>
@@ -11976,7 +12033,7 @@
       </p:sp>
       <p:sp>
         <p:nvSpPr>
-          <p:cNvPr id="177" name=""/>
+          <p:cNvPr id="178" name=""/>
           <p:cNvSpPr/>
           <p:nvPr/>
         </p:nvSpPr>
@@ -12034,7 +12091,7 @@
       </p:sp>
       <p:sp>
         <p:nvSpPr>
-          <p:cNvPr id="178" name=""/>
+          <p:cNvPr id="179" name=""/>
           <p:cNvSpPr/>
           <p:nvPr/>
         </p:nvSpPr>
@@ -12091,7 +12148,7 @@
       </p:sp>
       <p:sp>
         <p:nvSpPr>
-          <p:cNvPr id="179" name=""/>
+          <p:cNvPr id="180" name=""/>
           <p:cNvSpPr/>
           <p:nvPr/>
         </p:nvSpPr>
@@ -12151,7 +12208,7 @@
       </p:sp>
       <p:sp>
         <p:nvSpPr>
-          <p:cNvPr id="180" name=""/>
+          <p:cNvPr id="181" name=""/>
           <p:cNvSpPr/>
           <p:nvPr/>
         </p:nvSpPr>
@@ -12209,7 +12266,7 @@
       </p:sp>
       <p:sp>
         <p:nvSpPr>
-          <p:cNvPr id="181" name=""/>
+          <p:cNvPr id="182" name=""/>
           <p:cNvSpPr txBox="1"/>
           <p:nvPr/>
         </p:nvSpPr>
@@ -12257,7 +12314,7 @@
       </p:sp>
       <p:sp>
         <p:nvSpPr>
-          <p:cNvPr id="182" name=""/>
+          <p:cNvPr id="183" name=""/>
           <p:cNvSpPr txBox="1"/>
           <p:nvPr/>
         </p:nvSpPr>
@@ -12305,7 +12362,7 @@
       </p:sp>
       <p:sp>
         <p:nvSpPr>
-          <p:cNvPr id="183" name=""/>
+          <p:cNvPr id="184" name=""/>
           <p:cNvSpPr txBox="1"/>
           <p:nvPr/>
         </p:nvSpPr>
@@ -12353,7 +12410,7 @@
       </p:sp>
       <p:sp>
         <p:nvSpPr>
-          <p:cNvPr id="184" name=""/>
+          <p:cNvPr id="185" name=""/>
           <p:cNvSpPr/>
           <p:nvPr/>
         </p:nvSpPr>
@@ -12413,7 +12470,7 @@
       </p:sp>
       <p:sp>
         <p:nvSpPr>
-          <p:cNvPr id="185" name=""/>
+          <p:cNvPr id="186" name=""/>
           <p:cNvSpPr/>
           <p:nvPr/>
         </p:nvSpPr>
@@ -12760,7 +12817,7 @@
       </p:sp>
       <p:sp>
         <p:nvSpPr>
-          <p:cNvPr id="186" name=""/>
+          <p:cNvPr id="187" name=""/>
           <p:cNvSpPr/>
           <p:nvPr/>
         </p:nvSpPr>
@@ -13107,7 +13164,7 @@
       </p:sp>
       <p:sp>
         <p:nvSpPr>
-          <p:cNvPr id="187" name=""/>
+          <p:cNvPr id="188" name=""/>
           <p:cNvSpPr/>
           <p:nvPr/>
         </p:nvSpPr>
@@ -13454,7 +13511,7 @@
       </p:sp>
       <p:sp>
         <p:nvSpPr>
-          <p:cNvPr id="188" name=""/>
+          <p:cNvPr id="189" name=""/>
           <p:cNvSpPr/>
           <p:nvPr/>
         </p:nvSpPr>
@@ -13801,7 +13858,7 @@
       </p:sp>
       <p:sp>
         <p:nvSpPr>
-          <p:cNvPr id="189" name=""/>
+          <p:cNvPr id="190" name=""/>
           <p:cNvSpPr/>
           <p:nvPr/>
         </p:nvSpPr>
@@ -13844,7 +13901,7 @@
       </p:sp>
       <p:sp>
         <p:nvSpPr>
-          <p:cNvPr id="190" name=""/>
+          <p:cNvPr id="191" name=""/>
           <p:cNvSpPr/>
           <p:nvPr/>
         </p:nvSpPr>
@@ -13915,7 +13972,7 @@
       </p:sp>
       <p:sp>
         <p:nvSpPr>
-          <p:cNvPr id="191" name=""/>
+          <p:cNvPr id="192" name=""/>
           <p:cNvSpPr/>
           <p:nvPr/>
         </p:nvSpPr>
@@ -13958,7 +14015,7 @@
       </p:sp>
       <p:sp>
         <p:nvSpPr>
-          <p:cNvPr id="192" name=""/>
+          <p:cNvPr id="193" name=""/>
           <p:cNvSpPr/>
           <p:nvPr/>
         </p:nvSpPr>
@@ -14068,7 +14125,7 @@
       </p:sp>
       <p:sp>
         <p:nvSpPr>
-          <p:cNvPr id="193" name=""/>
+          <p:cNvPr id="194" name=""/>
           <p:cNvSpPr/>
           <p:nvPr/>
         </p:nvSpPr>
@@ -14111,7 +14168,7 @@
       </p:sp>
       <p:sp>
         <p:nvSpPr>
-          <p:cNvPr id="194" name=""/>
+          <p:cNvPr id="195" name=""/>
           <p:cNvSpPr/>
           <p:nvPr/>
         </p:nvSpPr>
@@ -14188,7 +14245,7 @@
       </p:sp>
       <p:sp>
         <p:nvSpPr>
-          <p:cNvPr id="195" name=""/>
+          <p:cNvPr id="196" name=""/>
           <p:cNvSpPr/>
           <p:nvPr/>
         </p:nvSpPr>
@@ -14231,7 +14288,7 @@
       </p:sp>
       <p:sp>
         <p:nvSpPr>
-          <p:cNvPr id="196" name=""/>
+          <p:cNvPr id="197" name=""/>
           <p:cNvSpPr/>
           <p:nvPr/>
         </p:nvSpPr>
@@ -14344,7 +14401,7 @@
       </p:sp>
       <p:sp>
         <p:nvSpPr>
-          <p:cNvPr id="197" name=""/>
+          <p:cNvPr id="198" name=""/>
           <p:cNvSpPr/>
           <p:nvPr/>
         </p:nvSpPr>
@@ -14700,7 +14757,7 @@
       </p:sp>
       <p:sp>
         <p:nvSpPr>
-          <p:cNvPr id="198" name=""/>
+          <p:cNvPr id="199" name=""/>
           <p:cNvSpPr/>
           <p:nvPr/>
         </p:nvSpPr>
@@ -15028,7 +15085,7 @@
       </p:sp>
       <p:sp>
         <p:nvSpPr>
-          <p:cNvPr id="199" name=""/>
+          <p:cNvPr id="200" name=""/>
           <p:cNvSpPr/>
           <p:nvPr/>
         </p:nvSpPr>
@@ -15372,7 +15429,7 @@
       </p:sp>
       <p:sp>
         <p:nvSpPr>
-          <p:cNvPr id="200" name=""/>
+          <p:cNvPr id="201" name=""/>
           <p:cNvSpPr/>
           <p:nvPr/>
         </p:nvSpPr>
@@ -15706,7 +15763,7 @@
       </p:sp>
       <p:sp>
         <p:nvSpPr>
-          <p:cNvPr id="201" name=""/>
+          <p:cNvPr id="202" name=""/>
           <p:cNvSpPr/>
           <p:nvPr/>
         </p:nvSpPr>
@@ -15990,7 +16047,7 @@
       </p:sp>
       <p:sp>
         <p:nvSpPr>
-          <p:cNvPr id="202" name=""/>
+          <p:cNvPr id="203" name=""/>
           <p:cNvSpPr/>
           <p:nvPr/>
         </p:nvSpPr>
@@ -16273,7 +16330,7 @@
       </p:sp>
       <p:sp>
         <p:nvSpPr>
-          <p:cNvPr id="203" name=""/>
+          <p:cNvPr id="204" name=""/>
           <p:cNvSpPr/>
           <p:nvPr/>
         </p:nvSpPr>
@@ -16545,7 +16602,7 @@
       </p:sp>
       <p:sp>
         <p:nvSpPr>
-          <p:cNvPr id="204" name=""/>
+          <p:cNvPr id="205" name=""/>
           <p:cNvSpPr/>
           <p:nvPr/>
         </p:nvSpPr>
@@ -16816,7 +16873,7 @@
       </p:sp>
       <p:sp>
         <p:nvSpPr>
-          <p:cNvPr id="205" name=""/>
+          <p:cNvPr id="206" name=""/>
           <p:cNvSpPr/>
           <p:nvPr/>
         </p:nvSpPr>
@@ -17217,7 +17274,7 @@
       </p:sp>
       <p:sp>
         <p:nvSpPr>
-          <p:cNvPr id="206" name=""/>
+          <p:cNvPr id="207" name=""/>
           <p:cNvSpPr/>
           <p:nvPr/>
         </p:nvSpPr>
@@ -17608,7 +17665,7 @@
       </p:sp>
       <p:sp>
         <p:nvSpPr>
-          <p:cNvPr id="207" name=""/>
+          <p:cNvPr id="208" name=""/>
           <p:cNvSpPr/>
           <p:nvPr/>
         </p:nvSpPr>
@@ -17961,7 +18018,7 @@
       </p:sp>
       <p:sp>
         <p:nvSpPr>
-          <p:cNvPr id="208" name=""/>
+          <p:cNvPr id="209" name=""/>
           <p:cNvSpPr/>
           <p:nvPr/>
         </p:nvSpPr>
@@ -18286,7 +18343,7 @@
       </p:sp>
       <p:sp>
         <p:nvSpPr>
-          <p:cNvPr id="209" name=""/>
+          <p:cNvPr id="210" name=""/>
           <p:cNvSpPr/>
           <p:nvPr/>
         </p:nvSpPr>
@@ -18525,7 +18582,7 @@
       </p:sp>
       <p:sp>
         <p:nvSpPr>
-          <p:cNvPr id="210" name=""/>
+          <p:cNvPr id="211" name=""/>
           <p:cNvSpPr/>
           <p:nvPr/>
         </p:nvSpPr>
@@ -18752,7 +18809,7 @@
       </p:sp>
       <p:sp>
         <p:nvSpPr>
-          <p:cNvPr id="211" name=""/>
+          <p:cNvPr id="212" name=""/>
           <p:cNvSpPr/>
           <p:nvPr/>
         </p:nvSpPr>
@@ -19033,7 +19090,7 @@
       </p:sp>
       <p:sp>
         <p:nvSpPr>
-          <p:cNvPr id="212" name=""/>
+          <p:cNvPr id="213" name=""/>
           <p:cNvSpPr/>
           <p:nvPr/>
         </p:nvSpPr>
@@ -19302,7 +19359,7 @@
       </p:sp>
       <p:sp>
         <p:nvSpPr>
-          <p:cNvPr id="213" name=""/>
+          <p:cNvPr id="214" name=""/>
           <p:cNvSpPr/>
           <p:nvPr/>
         </p:nvSpPr>
@@ -19583,7 +19640,7 @@
       </p:sp>
       <p:sp>
         <p:nvSpPr>
-          <p:cNvPr id="214" name=""/>
+          <p:cNvPr id="215" name=""/>
           <p:cNvSpPr/>
           <p:nvPr/>
         </p:nvSpPr>
@@ -19825,7 +19882,7 @@
       </p:sp>
       <p:sp>
         <p:nvSpPr>
-          <p:cNvPr id="215" name=""/>
+          <p:cNvPr id="216" name=""/>
           <p:cNvSpPr/>
           <p:nvPr/>
         </p:nvSpPr>
@@ -19883,7 +19940,7 @@
       </p:sp>
       <p:sp>
         <p:nvSpPr>
-          <p:cNvPr id="216" name=""/>
+          <p:cNvPr id="217" name=""/>
           <p:cNvSpPr/>
           <p:nvPr/>
         </p:nvSpPr>
@@ -19940,7 +19997,7 @@
       </p:sp>
       <p:sp>
         <p:nvSpPr>
-          <p:cNvPr id="217" name=""/>
+          <p:cNvPr id="218" name=""/>
           <p:cNvSpPr/>
           <p:nvPr/>
         </p:nvSpPr>
@@ -19998,7 +20055,7 @@
       </p:sp>
       <p:sp>
         <p:nvSpPr>
-          <p:cNvPr id="218" name=""/>
+          <p:cNvPr id="219" name=""/>
           <p:cNvSpPr/>
           <p:nvPr/>
         </p:nvSpPr>
@@ -20055,7 +20112,7 @@
       </p:sp>
       <p:sp>
         <p:nvSpPr>
-          <p:cNvPr id="219" name=""/>
+          <p:cNvPr id="220" name=""/>
           <p:cNvSpPr/>
           <p:nvPr/>
         </p:nvSpPr>
@@ -20113,7 +20170,7 @@
       </p:sp>
       <p:sp>
         <p:nvSpPr>
-          <p:cNvPr id="220" name=""/>
+          <p:cNvPr id="221" name=""/>
           <p:cNvSpPr/>
           <p:nvPr/>
         </p:nvSpPr>
@@ -20170,7 +20227,7 @@
       </p:sp>
       <p:sp>
         <p:nvSpPr>
-          <p:cNvPr id="221" name=""/>
+          <p:cNvPr id="222" name=""/>
           <p:cNvSpPr/>
           <p:nvPr/>
         </p:nvSpPr>
@@ -20228,7 +20285,7 @@
       </p:sp>
       <p:sp>
         <p:nvSpPr>
-          <p:cNvPr id="222" name=""/>
+          <p:cNvPr id="223" name=""/>
           <p:cNvSpPr/>
           <p:nvPr/>
         </p:nvSpPr>
@@ -20285,7 +20342,7 @@
       </p:sp>
       <p:sp>
         <p:nvSpPr>
-          <p:cNvPr id="223" name=""/>
+          <p:cNvPr id="224" name=""/>
           <p:cNvSpPr/>
           <p:nvPr/>
         </p:nvSpPr>
@@ -20343,7 +20400,7 @@
       </p:sp>
       <p:sp>
         <p:nvSpPr>
-          <p:cNvPr id="224" name=""/>
+          <p:cNvPr id="225" name=""/>
           <p:cNvSpPr/>
           <p:nvPr/>
         </p:nvSpPr>
@@ -20400,7 +20457,7 @@
       </p:sp>
       <p:sp>
         <p:nvSpPr>
-          <p:cNvPr id="225" name=""/>
+          <p:cNvPr id="226" name=""/>
           <p:cNvSpPr/>
           <p:nvPr/>
         </p:nvSpPr>
@@ -20458,7 +20515,7 @@
       </p:sp>
       <p:sp>
         <p:nvSpPr>
-          <p:cNvPr id="226" name=""/>
+          <p:cNvPr id="227" name=""/>
           <p:cNvSpPr/>
           <p:nvPr/>
         </p:nvSpPr>
@@ -20515,7 +20572,7 @@
       </p:sp>
       <p:sp>
         <p:nvSpPr>
-          <p:cNvPr id="227" name=""/>
+          <p:cNvPr id="228" name=""/>
           <p:cNvSpPr/>
           <p:nvPr/>
         </p:nvSpPr>
@@ -20573,7 +20630,7 @@
       </p:sp>
       <p:sp>
         <p:nvSpPr>
-          <p:cNvPr id="228" name=""/>
+          <p:cNvPr id="229" name=""/>
           <p:cNvSpPr/>
           <p:nvPr/>
         </p:nvSpPr>
@@ -20630,7 +20687,7 @@
       </p:sp>
       <p:sp>
         <p:nvSpPr>
-          <p:cNvPr id="229" name=""/>
+          <p:cNvPr id="230" name=""/>
           <p:cNvSpPr/>
           <p:nvPr/>
         </p:nvSpPr>
@@ -20688,7 +20745,7 @@
       </p:sp>
       <p:sp>
         <p:nvSpPr>
-          <p:cNvPr id="230" name=""/>
+          <p:cNvPr id="231" name=""/>
           <p:cNvSpPr/>
           <p:nvPr/>
         </p:nvSpPr>
@@ -20745,7 +20802,7 @@
       </p:sp>
       <p:sp>
         <p:nvSpPr>
-          <p:cNvPr id="231" name=""/>
+          <p:cNvPr id="232" name=""/>
           <p:cNvSpPr/>
           <p:nvPr/>
         </p:nvSpPr>
@@ -20803,7 +20860,7 @@
       </p:sp>
       <p:sp>
         <p:nvSpPr>
-          <p:cNvPr id="232" name=""/>
+          <p:cNvPr id="233" name=""/>
           <p:cNvSpPr/>
           <p:nvPr/>
         </p:nvSpPr>
@@ -20860,7 +20917,7 @@
       </p:sp>
       <p:sp>
         <p:nvSpPr>
-          <p:cNvPr id="233" name=""/>
+          <p:cNvPr id="234" name=""/>
           <p:cNvSpPr/>
           <p:nvPr/>
         </p:nvSpPr>
@@ -20918,7 +20975,7 @@
       </p:sp>
       <p:sp>
         <p:nvSpPr>
-          <p:cNvPr id="234" name=""/>
+          <p:cNvPr id="235" name=""/>
           <p:cNvSpPr/>
           <p:nvPr/>
         </p:nvSpPr>
@@ -20975,7 +21032,7 @@
       </p:sp>
       <p:sp>
         <p:nvSpPr>
-          <p:cNvPr id="235" name=""/>
+          <p:cNvPr id="236" name=""/>
           <p:cNvSpPr/>
           <p:nvPr/>
         </p:nvSpPr>
@@ -21033,7 +21090,7 @@
       </p:sp>
       <p:sp>
         <p:nvSpPr>
-          <p:cNvPr id="236" name=""/>
+          <p:cNvPr id="237" name=""/>
           <p:cNvSpPr/>
           <p:nvPr/>
         </p:nvSpPr>
@@ -21090,7 +21147,7 @@
       </p:sp>
       <p:sp>
         <p:nvSpPr>
-          <p:cNvPr id="237" name=""/>
+          <p:cNvPr id="238" name=""/>
           <p:cNvSpPr/>
           <p:nvPr/>
         </p:nvSpPr>
@@ -21148,7 +21205,7 @@
       </p:sp>
       <p:sp>
         <p:nvSpPr>
-          <p:cNvPr id="238" name=""/>
+          <p:cNvPr id="239" name=""/>
           <p:cNvSpPr/>
           <p:nvPr/>
         </p:nvSpPr>
@@ -21205,7 +21262,7 @@
       </p:sp>
       <p:sp>
         <p:nvSpPr>
-          <p:cNvPr id="239" name=""/>
+          <p:cNvPr id="240" name=""/>
           <p:cNvSpPr/>
           <p:nvPr/>
         </p:nvSpPr>
@@ -21263,7 +21320,7 @@
       </p:sp>
       <p:sp>
         <p:nvSpPr>
-          <p:cNvPr id="240" name=""/>
+          <p:cNvPr id="241" name=""/>
           <p:cNvSpPr/>
           <p:nvPr/>
         </p:nvSpPr>
@@ -21320,7 +21377,7 @@
       </p:sp>
       <p:sp>
         <p:nvSpPr>
-          <p:cNvPr id="241" name=""/>
+          <p:cNvPr id="242" name=""/>
           <p:cNvSpPr/>
           <p:nvPr/>
         </p:nvSpPr>
@@ -21378,7 +21435,7 @@
       </p:sp>
       <p:sp>
         <p:nvSpPr>
-          <p:cNvPr id="242" name=""/>
+          <p:cNvPr id="243" name=""/>
           <p:cNvSpPr/>
           <p:nvPr/>
         </p:nvSpPr>
@@ -21435,7 +21492,7 @@
       </p:sp>
       <p:sp>
         <p:nvSpPr>
-          <p:cNvPr id="243" name=""/>
+          <p:cNvPr id="244" name=""/>
           <p:cNvSpPr/>
           <p:nvPr/>
         </p:nvSpPr>
@@ -21493,7 +21550,7 @@
       </p:sp>
       <p:sp>
         <p:nvSpPr>
-          <p:cNvPr id="244" name=""/>
+          <p:cNvPr id="245" name=""/>
           <p:cNvSpPr/>
           <p:nvPr/>
         </p:nvSpPr>
@@ -21550,7 +21607,7 @@
       </p:sp>
       <p:sp>
         <p:nvSpPr>
-          <p:cNvPr id="245" name=""/>
+          <p:cNvPr id="246" name=""/>
           <p:cNvSpPr/>
           <p:nvPr/>
         </p:nvSpPr>
@@ -21608,7 +21665,7 @@
       </p:sp>
       <p:sp>
         <p:nvSpPr>
-          <p:cNvPr id="246" name=""/>
+          <p:cNvPr id="247" name=""/>
           <p:cNvSpPr/>
           <p:nvPr/>
         </p:nvSpPr>
@@ -21665,7 +21722,7 @@
       </p:sp>
       <p:sp>
         <p:nvSpPr>
-          <p:cNvPr id="247" name=""/>
+          <p:cNvPr id="248" name=""/>
           <p:cNvSpPr/>
           <p:nvPr/>
         </p:nvSpPr>
@@ -21723,7 +21780,7 @@
       </p:sp>
       <p:sp>
         <p:nvSpPr>
-          <p:cNvPr id="248" name=""/>
+          <p:cNvPr id="249" name=""/>
           <p:cNvSpPr/>
           <p:nvPr/>
         </p:nvSpPr>
@@ -21780,7 +21837,7 @@
       </p:sp>
       <p:sp>
         <p:nvSpPr>
-          <p:cNvPr id="249" name=""/>
+          <p:cNvPr id="250" name=""/>
           <p:cNvSpPr/>
           <p:nvPr/>
         </p:nvSpPr>
@@ -21838,7 +21895,7 @@
       </p:sp>
       <p:sp>
         <p:nvSpPr>
-          <p:cNvPr id="250" name=""/>
+          <p:cNvPr id="251" name=""/>
           <p:cNvSpPr/>
           <p:nvPr/>
         </p:nvSpPr>
@@ -21895,7 +21952,7 @@
       </p:sp>
       <p:sp>
         <p:nvSpPr>
-          <p:cNvPr id="251" name=""/>
+          <p:cNvPr id="252" name=""/>
           <p:cNvSpPr/>
           <p:nvPr/>
         </p:nvSpPr>
@@ -21953,7 +22010,7 @@
       </p:sp>
       <p:sp>
         <p:nvSpPr>
-          <p:cNvPr id="252" name=""/>
+          <p:cNvPr id="253" name=""/>
           <p:cNvSpPr/>
           <p:nvPr/>
         </p:nvSpPr>
@@ -22010,7 +22067,7 @@
       </p:sp>
       <p:sp>
         <p:nvSpPr>
-          <p:cNvPr id="253" name=""/>
+          <p:cNvPr id="254" name=""/>
           <p:cNvSpPr/>
           <p:nvPr/>
         </p:nvSpPr>
@@ -22068,7 +22125,7 @@
       </p:sp>
       <p:sp>
         <p:nvSpPr>
-          <p:cNvPr id="254" name=""/>
+          <p:cNvPr id="255" name=""/>
           <p:cNvSpPr/>
           <p:nvPr/>
         </p:nvSpPr>
@@ -22125,7 +22182,7 @@
       </p:sp>
       <p:sp>
         <p:nvSpPr>
-          <p:cNvPr id="255" name=""/>
+          <p:cNvPr id="256" name=""/>
           <p:cNvSpPr/>
           <p:nvPr/>
         </p:nvSpPr>
@@ -22183,7 +22240,7 @@
       </p:sp>
       <p:sp>
         <p:nvSpPr>
-          <p:cNvPr id="256" name=""/>
+          <p:cNvPr id="257" name=""/>
           <p:cNvSpPr/>
           <p:nvPr/>
         </p:nvSpPr>
@@ -22240,7 +22297,7 @@
       </p:sp>
       <p:sp>
         <p:nvSpPr>
-          <p:cNvPr id="257" name=""/>
+          <p:cNvPr id="258" name=""/>
           <p:cNvSpPr/>
           <p:nvPr/>
         </p:nvSpPr>
@@ -22298,7 +22355,7 @@
       </p:sp>
       <p:sp>
         <p:nvSpPr>
-          <p:cNvPr id="258" name=""/>
+          <p:cNvPr id="259" name=""/>
           <p:cNvSpPr/>
           <p:nvPr/>
         </p:nvSpPr>
@@ -22355,7 +22412,7 @@
       </p:sp>
       <p:sp>
         <p:nvSpPr>
-          <p:cNvPr id="259" name=""/>
+          <p:cNvPr id="260" name=""/>
           <p:cNvSpPr/>
           <p:nvPr/>
         </p:nvSpPr>
@@ -22413,7 +22470,7 @@
       </p:sp>
       <p:sp>
         <p:nvSpPr>
-          <p:cNvPr id="260" name=""/>
+          <p:cNvPr id="261" name=""/>
           <p:cNvSpPr/>
           <p:nvPr/>
         </p:nvSpPr>
@@ -22470,7 +22527,7 @@
       </p:sp>
       <p:sp>
         <p:nvSpPr>
-          <p:cNvPr id="261" name=""/>
+          <p:cNvPr id="262" name=""/>
           <p:cNvSpPr/>
           <p:nvPr/>
         </p:nvSpPr>
@@ -22528,7 +22585,7 @@
       </p:sp>
       <p:sp>
         <p:nvSpPr>
-          <p:cNvPr id="262" name=""/>
+          <p:cNvPr id="263" name=""/>
           <p:cNvSpPr/>
           <p:nvPr/>
         </p:nvSpPr>
@@ -22585,7 +22642,7 @@
       </p:sp>
       <p:sp>
         <p:nvSpPr>
-          <p:cNvPr id="263" name=""/>
+          <p:cNvPr id="264" name=""/>
           <p:cNvSpPr/>
           <p:nvPr/>
         </p:nvSpPr>
@@ -22643,7 +22700,7 @@
       </p:sp>
       <p:sp>
         <p:nvSpPr>
-          <p:cNvPr id="264" name=""/>
+          <p:cNvPr id="265" name=""/>
           <p:cNvSpPr/>
           <p:nvPr/>
         </p:nvSpPr>
@@ -22700,7 +22757,7 @@
       </p:sp>
       <p:sp>
         <p:nvSpPr>
-          <p:cNvPr id="265" name=""/>
+          <p:cNvPr id="266" name=""/>
           <p:cNvSpPr/>
           <p:nvPr/>
         </p:nvSpPr>
@@ -22758,7 +22815,7 @@
       </p:sp>
       <p:sp>
         <p:nvSpPr>
-          <p:cNvPr id="266" name=""/>
+          <p:cNvPr id="267" name=""/>
           <p:cNvSpPr/>
           <p:nvPr/>
         </p:nvSpPr>
@@ -22815,7 +22872,7 @@
       </p:sp>
       <p:sp>
         <p:nvSpPr>
-          <p:cNvPr id="267" name=""/>
+          <p:cNvPr id="268" name=""/>
           <p:cNvSpPr/>
           <p:nvPr/>
         </p:nvSpPr>
@@ -22873,7 +22930,7 @@
       </p:sp>
       <p:sp>
         <p:nvSpPr>
-          <p:cNvPr id="268" name=""/>
+          <p:cNvPr id="269" name=""/>
           <p:cNvSpPr/>
           <p:nvPr/>
         </p:nvSpPr>
@@ -22930,7 +22987,7 @@
       </p:sp>
       <p:sp>
         <p:nvSpPr>
-          <p:cNvPr id="269" name=""/>
+          <p:cNvPr id="270" name=""/>
           <p:cNvSpPr/>
           <p:nvPr/>
         </p:nvSpPr>
@@ -22988,7 +23045,7 @@
       </p:sp>
       <p:sp>
         <p:nvSpPr>
-          <p:cNvPr id="270" name=""/>
+          <p:cNvPr id="271" name=""/>
           <p:cNvSpPr/>
           <p:nvPr/>
         </p:nvSpPr>
@@ -23045,7 +23102,7 @@
       </p:sp>
       <p:sp>
         <p:nvSpPr>
-          <p:cNvPr id="271" name=""/>
+          <p:cNvPr id="272" name=""/>
           <p:cNvSpPr/>
           <p:nvPr/>
         </p:nvSpPr>
@@ -23103,7 +23160,7 @@
       </p:sp>
       <p:sp>
         <p:nvSpPr>
-          <p:cNvPr id="272" name=""/>
+          <p:cNvPr id="273" name=""/>
           <p:cNvSpPr/>
           <p:nvPr/>
         </p:nvSpPr>
@@ -23160,7 +23217,7 @@
       </p:sp>
       <p:sp>
         <p:nvSpPr>
-          <p:cNvPr id="273" name=""/>
+          <p:cNvPr id="274" name=""/>
           <p:cNvSpPr/>
           <p:nvPr/>
         </p:nvSpPr>
@@ -23218,7 +23275,7 @@
       </p:sp>
       <p:sp>
         <p:nvSpPr>
-          <p:cNvPr id="274" name=""/>
+          <p:cNvPr id="275" name=""/>
           <p:cNvSpPr/>
           <p:nvPr/>
         </p:nvSpPr>
@@ -23275,7 +23332,7 @@
       </p:sp>
       <p:sp>
         <p:nvSpPr>
-          <p:cNvPr id="275" name=""/>
+          <p:cNvPr id="276" name=""/>
           <p:cNvSpPr/>
           <p:nvPr/>
         </p:nvSpPr>
@@ -23333,7 +23390,7 @@
       </p:sp>
       <p:sp>
         <p:nvSpPr>
-          <p:cNvPr id="276" name=""/>
+          <p:cNvPr id="277" name=""/>
           <p:cNvSpPr/>
           <p:nvPr/>
         </p:nvSpPr>
@@ -23390,7 +23447,7 @@
       </p:sp>
       <p:sp>
         <p:nvSpPr>
-          <p:cNvPr id="277" name=""/>
+          <p:cNvPr id="278" name=""/>
           <p:cNvSpPr/>
           <p:nvPr/>
         </p:nvSpPr>
@@ -23448,7 +23505,7 @@
       </p:sp>
       <p:sp>
         <p:nvSpPr>
-          <p:cNvPr id="278" name=""/>
+          <p:cNvPr id="279" name=""/>
           <p:cNvSpPr/>
           <p:nvPr/>
         </p:nvSpPr>
@@ -23505,7 +23562,7 @@
       </p:sp>
       <p:sp>
         <p:nvSpPr>
-          <p:cNvPr id="279" name=""/>
+          <p:cNvPr id="280" name=""/>
           <p:cNvSpPr/>
           <p:nvPr/>
         </p:nvSpPr>
@@ -23563,7 +23620,7 @@
       </p:sp>
       <p:sp>
         <p:nvSpPr>
-          <p:cNvPr id="280" name=""/>
+          <p:cNvPr id="281" name=""/>
           <p:cNvSpPr/>
           <p:nvPr/>
         </p:nvSpPr>
@@ -23620,7 +23677,7 @@
       </p:sp>
       <p:sp>
         <p:nvSpPr>
-          <p:cNvPr id="281" name=""/>
+          <p:cNvPr id="282" name=""/>
           <p:cNvSpPr/>
           <p:nvPr/>
         </p:nvSpPr>
@@ -23678,7 +23735,7 @@
       </p:sp>
       <p:sp>
         <p:nvSpPr>
-          <p:cNvPr id="282" name=""/>
+          <p:cNvPr id="283" name=""/>
           <p:cNvSpPr/>
           <p:nvPr/>
         </p:nvSpPr>
@@ -23735,7 +23792,7 @@
       </p:sp>
       <p:sp>
         <p:nvSpPr>
-          <p:cNvPr id="283" name=""/>
+          <p:cNvPr id="284" name=""/>
           <p:cNvSpPr/>
           <p:nvPr/>
         </p:nvSpPr>
@@ -23793,7 +23850,7 @@
       </p:sp>
       <p:sp>
         <p:nvSpPr>
-          <p:cNvPr id="284" name=""/>
+          <p:cNvPr id="285" name=""/>
           <p:cNvSpPr/>
           <p:nvPr/>
         </p:nvSpPr>
@@ -23850,7 +23907,7 @@
       </p:sp>
       <p:sp>
         <p:nvSpPr>
-          <p:cNvPr id="285" name=""/>
+          <p:cNvPr id="286" name=""/>
           <p:cNvSpPr/>
           <p:nvPr/>
         </p:nvSpPr>
@@ -23908,7 +23965,7 @@
       </p:sp>
       <p:sp>
         <p:nvSpPr>
-          <p:cNvPr id="286" name=""/>
+          <p:cNvPr id="287" name=""/>
           <p:cNvSpPr/>
           <p:nvPr/>
         </p:nvSpPr>
@@ -23965,7 +24022,7 @@
       </p:sp>
       <p:sp>
         <p:nvSpPr>
-          <p:cNvPr id="287" name=""/>
+          <p:cNvPr id="288" name=""/>
           <p:cNvSpPr/>
           <p:nvPr/>
         </p:nvSpPr>
@@ -24023,7 +24080,7 @@
       </p:sp>
       <p:sp>
         <p:nvSpPr>
-          <p:cNvPr id="288" name=""/>
+          <p:cNvPr id="289" name=""/>
           <p:cNvSpPr/>
           <p:nvPr/>
         </p:nvSpPr>
@@ -24080,7 +24137,7 @@
       </p:sp>
       <p:sp>
         <p:nvSpPr>
-          <p:cNvPr id="289" name=""/>
+          <p:cNvPr id="290" name=""/>
           <p:cNvSpPr/>
           <p:nvPr/>
         </p:nvSpPr>
@@ -24138,7 +24195,7 @@
       </p:sp>
       <p:sp>
         <p:nvSpPr>
-          <p:cNvPr id="290" name=""/>
+          <p:cNvPr id="291" name=""/>
           <p:cNvSpPr/>
           <p:nvPr/>
         </p:nvSpPr>
@@ -24195,7 +24252,7 @@
       </p:sp>
       <p:sp>
         <p:nvSpPr>
-          <p:cNvPr id="291" name=""/>
+          <p:cNvPr id="292" name=""/>
           <p:cNvSpPr/>
           <p:nvPr/>
         </p:nvSpPr>
@@ -24253,7 +24310,7 @@
       </p:sp>
       <p:sp>
         <p:nvSpPr>
-          <p:cNvPr id="292" name=""/>
+          <p:cNvPr id="293" name=""/>
           <p:cNvSpPr/>
           <p:nvPr/>
         </p:nvSpPr>
@@ -24310,7 +24367,7 @@
       </p:sp>
       <p:sp>
         <p:nvSpPr>
-          <p:cNvPr id="293" name=""/>
+          <p:cNvPr id="294" name=""/>
           <p:cNvSpPr/>
           <p:nvPr/>
         </p:nvSpPr>
@@ -24368,7 +24425,7 @@
       </p:sp>
       <p:sp>
         <p:nvSpPr>
-          <p:cNvPr id="294" name=""/>
+          <p:cNvPr id="295" name=""/>
           <p:cNvSpPr/>
           <p:nvPr/>
         </p:nvSpPr>
@@ -24425,7 +24482,7 @@
       </p:sp>
       <p:sp>
         <p:nvSpPr>
-          <p:cNvPr id="295" name=""/>
+          <p:cNvPr id="296" name=""/>
           <p:cNvSpPr/>
           <p:nvPr/>
         </p:nvSpPr>
@@ -24483,7 +24540,7 @@
       </p:sp>
       <p:sp>
         <p:nvSpPr>
-          <p:cNvPr id="296" name=""/>
+          <p:cNvPr id="297" name=""/>
           <p:cNvSpPr/>
           <p:nvPr/>
         </p:nvSpPr>
@@ -24540,7 +24597,7 @@
       </p:sp>
       <p:sp>
         <p:nvSpPr>
-          <p:cNvPr id="297" name=""/>
+          <p:cNvPr id="298" name=""/>
           <p:cNvSpPr/>
           <p:nvPr/>
         </p:nvSpPr>
@@ -24598,7 +24655,7 @@
       </p:sp>
       <p:sp>
         <p:nvSpPr>
-          <p:cNvPr id="298" name=""/>
+          <p:cNvPr id="299" name=""/>
           <p:cNvSpPr/>
           <p:nvPr/>
         </p:nvSpPr>
@@ -24655,7 +24712,7 @@
       </p:sp>
       <p:sp>
         <p:nvSpPr>
-          <p:cNvPr id="299" name=""/>
+          <p:cNvPr id="300" name=""/>
           <p:cNvSpPr/>
           <p:nvPr/>
         </p:nvSpPr>
@@ -24713,7 +24770,7 @@
       </p:sp>
       <p:sp>
         <p:nvSpPr>
-          <p:cNvPr id="300" name=""/>
+          <p:cNvPr id="301" name=""/>
           <p:cNvSpPr/>
           <p:nvPr/>
         </p:nvSpPr>
@@ -24770,7 +24827,7 @@
       </p:sp>
       <p:sp>
         <p:nvSpPr>
-          <p:cNvPr id="301" name=""/>
+          <p:cNvPr id="302" name=""/>
           <p:cNvSpPr/>
           <p:nvPr/>
         </p:nvSpPr>
@@ -24828,7 +24885,7 @@
       </p:sp>
       <p:sp>
         <p:nvSpPr>
-          <p:cNvPr id="302" name=""/>
+          <p:cNvPr id="303" name=""/>
           <p:cNvSpPr/>
           <p:nvPr/>
         </p:nvSpPr>
@@ -24885,7 +24942,7 @@
       </p:sp>
       <p:sp>
         <p:nvSpPr>
-          <p:cNvPr id="303" name=""/>
+          <p:cNvPr id="304" name=""/>
           <p:cNvSpPr/>
           <p:nvPr/>
         </p:nvSpPr>
@@ -24943,7 +25000,7 @@
       </p:sp>
       <p:sp>
         <p:nvSpPr>
-          <p:cNvPr id="304" name=""/>
+          <p:cNvPr id="305" name=""/>
           <p:cNvSpPr/>
           <p:nvPr/>
         </p:nvSpPr>
@@ -25000,7 +25057,7 @@
       </p:sp>
       <p:sp>
         <p:nvSpPr>
-          <p:cNvPr id="305" name=""/>
+          <p:cNvPr id="306" name=""/>
           <p:cNvSpPr/>
           <p:nvPr/>
         </p:nvSpPr>
@@ -25058,7 +25115,7 @@
       </p:sp>
       <p:sp>
         <p:nvSpPr>
-          <p:cNvPr id="306" name=""/>
+          <p:cNvPr id="307" name=""/>
           <p:cNvSpPr/>
           <p:nvPr/>
         </p:nvSpPr>
@@ -25115,7 +25172,7 @@
       </p:sp>
       <p:sp>
         <p:nvSpPr>
-          <p:cNvPr id="307" name=""/>
+          <p:cNvPr id="308" name=""/>
           <p:cNvSpPr/>
           <p:nvPr/>
         </p:nvSpPr>
@@ -25173,7 +25230,7 @@
       </p:sp>
       <p:sp>
         <p:nvSpPr>
-          <p:cNvPr id="308" name=""/>
+          <p:cNvPr id="309" name=""/>
           <p:cNvSpPr/>
           <p:nvPr/>
         </p:nvSpPr>
@@ -25230,7 +25287,7 @@
       </p:sp>
       <p:sp>
         <p:nvSpPr>
-          <p:cNvPr id="309" name=""/>
+          <p:cNvPr id="310" name=""/>
           <p:cNvSpPr/>
           <p:nvPr/>
         </p:nvSpPr>
@@ -25288,7 +25345,7 @@
       </p:sp>
       <p:sp>
         <p:nvSpPr>
-          <p:cNvPr id="310" name=""/>
+          <p:cNvPr id="311" name=""/>
           <p:cNvSpPr/>
           <p:nvPr/>
         </p:nvSpPr>
@@ -25345,7 +25402,7 @@
       </p:sp>
       <p:sp>
         <p:nvSpPr>
-          <p:cNvPr id="311" name=""/>
+          <p:cNvPr id="312" name=""/>
           <p:cNvSpPr txBox="1"/>
           <p:nvPr/>
         </p:nvSpPr>
@@ -25393,7 +25450,7 @@
       </p:sp>
       <p:sp>
         <p:nvSpPr>
-          <p:cNvPr id="312" name=""/>
+          <p:cNvPr id="313" name=""/>
           <p:cNvSpPr txBox="1"/>
           <p:nvPr/>
         </p:nvSpPr>
@@ -25441,7 +25498,7 @@
       </p:sp>
       <p:sp>
         <p:nvSpPr>
-          <p:cNvPr id="313" name=""/>
+          <p:cNvPr id="314" name=""/>
           <p:cNvSpPr txBox="1"/>
           <p:nvPr/>
         </p:nvSpPr>
@@ -25489,7 +25546,7 @@
       </p:sp>
       <p:sp>
         <p:nvSpPr>
-          <p:cNvPr id="314" name=""/>
+          <p:cNvPr id="315" name=""/>
           <p:cNvSpPr txBox="1"/>
           <p:nvPr/>
         </p:nvSpPr>
@@ -25537,7 +25594,7 @@
       </p:sp>
       <p:sp>
         <p:nvSpPr>
-          <p:cNvPr id="315" name=""/>
+          <p:cNvPr id="316" name=""/>
           <p:cNvSpPr txBox="1"/>
           <p:nvPr/>
         </p:nvSpPr>
@@ -25585,7 +25642,7 @@
       </p:sp>
       <p:sp>
         <p:nvSpPr>
-          <p:cNvPr id="316" name=""/>
+          <p:cNvPr id="317" name=""/>
           <p:cNvSpPr txBox="1"/>
           <p:nvPr/>
         </p:nvSpPr>
@@ -25633,7 +25690,7 @@
       </p:sp>
       <p:sp>
         <p:nvSpPr>
-          <p:cNvPr id="317" name=""/>
+          <p:cNvPr id="318" name=""/>
           <p:cNvSpPr txBox="1"/>
           <p:nvPr/>
         </p:nvSpPr>
@@ -25681,7 +25738,7 @@
       </p:sp>
       <p:sp>
         <p:nvSpPr>
-          <p:cNvPr id="318" name=""/>
+          <p:cNvPr id="319" name=""/>
           <p:cNvSpPr txBox="1"/>
           <p:nvPr/>
         </p:nvSpPr>
@@ -25729,7 +25786,7 @@
       </p:sp>
       <p:sp>
         <p:nvSpPr>
-          <p:cNvPr id="319" name=""/>
+          <p:cNvPr id="320" name=""/>
           <p:cNvSpPr txBox="1"/>
           <p:nvPr/>
         </p:nvSpPr>
@@ -25777,7 +25834,7 @@
       </p:sp>
       <p:sp>
         <p:nvSpPr>
-          <p:cNvPr id="320" name=""/>
+          <p:cNvPr id="321" name=""/>
           <p:cNvSpPr txBox="1"/>
           <p:nvPr/>
         </p:nvSpPr>
@@ -25825,7 +25882,7 @@
       </p:sp>
       <p:sp>
         <p:nvSpPr>
-          <p:cNvPr id="321" name=""/>
+          <p:cNvPr id="322" name=""/>
           <p:cNvSpPr txBox="1"/>
           <p:nvPr/>
         </p:nvSpPr>
@@ -25873,7 +25930,7 @@
       </p:sp>
       <p:sp>
         <p:nvSpPr>
-          <p:cNvPr id="322" name=""/>
+          <p:cNvPr id="323" name=""/>
           <p:cNvSpPr/>
           <p:nvPr/>
         </p:nvSpPr>
@@ -25916,7 +25973,7 @@
       </p:sp>
       <p:sp>
         <p:nvSpPr>
-          <p:cNvPr id="323" name=""/>
+          <p:cNvPr id="324" name=""/>
           <p:cNvSpPr/>
           <p:nvPr/>
         </p:nvSpPr>
@@ -25974,7 +26031,7 @@
       </p:sp>
       <p:sp>
         <p:nvSpPr>
-          <p:cNvPr id="324" name=""/>
+          <p:cNvPr id="325" name=""/>
           <p:cNvSpPr/>
           <p:nvPr/>
         </p:nvSpPr>
@@ -26031,7 +26088,7 @@
       </p:sp>
       <p:sp>
         <p:nvSpPr>
-          <p:cNvPr id="325" name=""/>
+          <p:cNvPr id="326" name=""/>
           <p:cNvSpPr/>
           <p:nvPr/>
         </p:nvSpPr>
@@ -26074,7 +26131,7 @@
       </p:sp>
       <p:sp>
         <p:nvSpPr>
-          <p:cNvPr id="326" name=""/>
+          <p:cNvPr id="327" name=""/>
           <p:cNvSpPr/>
           <p:nvPr/>
         </p:nvSpPr>
@@ -26132,7 +26189,7 @@
       </p:sp>
       <p:sp>
         <p:nvSpPr>
-          <p:cNvPr id="327" name=""/>
+          <p:cNvPr id="328" name=""/>
           <p:cNvSpPr/>
           <p:nvPr/>
         </p:nvSpPr>
@@ -26189,7 +26246,7 @@
       </p:sp>
       <p:sp>
         <p:nvSpPr>
-          <p:cNvPr id="328" name=""/>
+          <p:cNvPr id="329" name=""/>
           <p:cNvSpPr/>
           <p:nvPr/>
         </p:nvSpPr>
@@ -26232,7 +26289,7 @@
       </p:sp>
       <p:sp>
         <p:nvSpPr>
-          <p:cNvPr id="329" name=""/>
+          <p:cNvPr id="330" name=""/>
           <p:cNvSpPr/>
           <p:nvPr/>
         </p:nvSpPr>
@@ -26290,7 +26347,7 @@
       </p:sp>
       <p:sp>
         <p:nvSpPr>
-          <p:cNvPr id="330" name=""/>
+          <p:cNvPr id="331" name=""/>
           <p:cNvSpPr/>
           <p:nvPr/>
         </p:nvSpPr>
@@ -26347,7 +26404,7 @@
       </p:sp>
       <p:sp>
         <p:nvSpPr>
-          <p:cNvPr id="331" name=""/>
+          <p:cNvPr id="332" name=""/>
           <p:cNvSpPr/>
           <p:nvPr/>
         </p:nvSpPr>
@@ -26390,7 +26447,7 @@
       </p:sp>
       <p:sp>
         <p:nvSpPr>
-          <p:cNvPr id="332" name=""/>
+          <p:cNvPr id="333" name=""/>
           <p:cNvSpPr/>
           <p:nvPr/>
         </p:nvSpPr>
@@ -26448,7 +26505,7 @@
       </p:sp>
       <p:sp>
         <p:nvSpPr>
-          <p:cNvPr id="333" name=""/>
+          <p:cNvPr id="334" name=""/>
           <p:cNvSpPr/>
           <p:nvPr/>
         </p:nvSpPr>
@@ -26505,7 +26562,7 @@
       </p:sp>
       <p:sp>
         <p:nvSpPr>
-          <p:cNvPr id="334" name=""/>
+          <p:cNvPr id="335" name=""/>
           <p:cNvSpPr/>
           <p:nvPr/>
         </p:nvSpPr>
@@ -26548,7 +26605,7 @@
       </p:sp>
       <p:sp>
         <p:nvSpPr>
-          <p:cNvPr id="335" name=""/>
+          <p:cNvPr id="336" name=""/>
           <p:cNvSpPr/>
           <p:nvPr/>
         </p:nvSpPr>
@@ -26606,7 +26663,7 @@
       </p:sp>
       <p:sp>
         <p:nvSpPr>
-          <p:cNvPr id="336" name=""/>
+          <p:cNvPr id="337" name=""/>
           <p:cNvSpPr/>
           <p:nvPr/>
         </p:nvSpPr>
@@ -26663,7 +26720,7 @@
       </p:sp>
       <p:sp>
         <p:nvSpPr>
-          <p:cNvPr id="337" name=""/>
+          <p:cNvPr id="338" name=""/>
           <p:cNvSpPr/>
           <p:nvPr/>
         </p:nvSpPr>
@@ -26706,7 +26763,7 @@
       </p:sp>
       <p:sp>
         <p:nvSpPr>
-          <p:cNvPr id="338" name=""/>
+          <p:cNvPr id="339" name=""/>
           <p:cNvSpPr/>
           <p:nvPr/>
         </p:nvSpPr>
@@ -26764,7 +26821,7 @@
       </p:sp>
       <p:sp>
         <p:nvSpPr>
-          <p:cNvPr id="339" name=""/>
+          <p:cNvPr id="340" name=""/>
           <p:cNvSpPr/>
           <p:nvPr/>
         </p:nvSpPr>
@@ -26821,7 +26878,7 @@
       </p:sp>
       <p:sp>
         <p:nvSpPr>
-          <p:cNvPr id="340" name=""/>
+          <p:cNvPr id="341" name=""/>
           <p:cNvSpPr txBox="1"/>
           <p:nvPr/>
         </p:nvSpPr>
@@ -26869,7 +26926,7 @@
       </p:sp>
       <p:sp>
         <p:nvSpPr>
-          <p:cNvPr id="341" name=""/>
+          <p:cNvPr id="342" name=""/>
           <p:cNvSpPr txBox="1"/>
           <p:nvPr/>
         </p:nvSpPr>
@@ -26917,7 +26974,7 @@
       </p:sp>
       <p:sp>
         <p:nvSpPr>
-          <p:cNvPr id="342" name=""/>
+          <p:cNvPr id="343" name=""/>
           <p:cNvSpPr txBox="1"/>
           <p:nvPr/>
         </p:nvSpPr>
@@ -26965,7 +27022,7 @@
       </p:sp>
       <p:sp>
         <p:nvSpPr>
-          <p:cNvPr id="343" name=""/>
+          <p:cNvPr id="344" name=""/>
           <p:cNvSpPr txBox="1"/>
           <p:nvPr/>
         </p:nvSpPr>
@@ -27013,7 +27070,7 @@
       </p:sp>
       <p:sp>
         <p:nvSpPr>
-          <p:cNvPr id="344" name=""/>
+          <p:cNvPr id="345" name=""/>
           <p:cNvSpPr txBox="1"/>
           <p:nvPr/>
         </p:nvSpPr>
@@ -27061,7 +27118,7 @@
       </p:sp>
       <p:sp>
         <p:nvSpPr>
-          <p:cNvPr id="345" name=""/>
+          <p:cNvPr id="346" name=""/>
           <p:cNvSpPr txBox="1"/>
           <p:nvPr/>
         </p:nvSpPr>
@@ -27109,7 +27166,7 @@
       </p:sp>
       <p:sp>
         <p:nvSpPr>
-          <p:cNvPr id="346" name=""/>
+          <p:cNvPr id="347" name=""/>
           <p:cNvSpPr txBox="1"/>
           <p:nvPr/>
         </p:nvSpPr>
@@ -27157,7 +27214,7 @@
       </p:sp>
       <p:sp>
         <p:nvSpPr>
-          <p:cNvPr id="347" name=""/>
+          <p:cNvPr id="348" name=""/>
           <p:cNvSpPr txBox="1"/>
           <p:nvPr/>
         </p:nvSpPr>
